--- a/content/docs/theory-analysis/envoy-traffic-processing/images/images.pptx
+++ b/content/docs/theory-analysis/envoy-traffic-processing/images/images.pptx
@@ -5,14 +5,15 @@
     <p:sldMasterId id="2147483648" r:id="rId1"/>
   </p:sldMasterIdLst>
   <p:notesMasterIdLst>
-    <p:notesMasterId r:id="rId7"/>
+    <p:notesMasterId r:id="rId8"/>
   </p:notesMasterIdLst>
   <p:sldIdLst>
-    <p:sldId id="369" r:id="rId2"/>
-    <p:sldId id="387" r:id="rId3"/>
-    <p:sldId id="365" r:id="rId4"/>
-    <p:sldId id="386" r:id="rId5"/>
-    <p:sldId id="363" r:id="rId6"/>
+    <p:sldId id="388" r:id="rId2"/>
+    <p:sldId id="369" r:id="rId3"/>
+    <p:sldId id="387" r:id="rId4"/>
+    <p:sldId id="365" r:id="rId5"/>
+    <p:sldId id="386" r:id="rId6"/>
+    <p:sldId id="363" r:id="rId7"/>
   </p:sldIdLst>
   <p:sldSz cx="9144000" cy="5143500" type="screen16x9"/>
   <p:notesSz cx="6858000" cy="9144000"/>
@@ -3382,6 +3383,2120 @@
         <p:cNvPr id="1" name="">
           <a:extLst>
             <a:ext uri="{FF2B5EF4-FFF2-40B4-BE49-F238E27FC236}">
+              <a16:creationId xmlns:a16="http://schemas.microsoft.com/office/drawing/2014/main" id="{0B1EEEF2-0A0B-6026-59B8-A2BD401D91F6}"/>
+            </a:ext>
+          </a:extLst>
+        </p:cNvPr>
+        <p:cNvGrpSpPr/>
+        <p:nvPr/>
+      </p:nvGrpSpPr>
+      <p:grpSpPr>
+        <a:xfrm>
+          <a:off x="0" y="0"/>
+          <a:ext cx="0" cy="0"/>
+          <a:chOff x="0" y="0"/>
+          <a:chExt cx="0" cy="0"/>
+        </a:xfrm>
+      </p:grpSpPr>
+      <p:sp>
+        <p:nvSpPr>
+          <p:cNvPr id="2" name="모서리가 둥근 직사각형 1">
+            <a:extLst>
+              <a:ext uri="{FF2B5EF4-FFF2-40B4-BE49-F238E27FC236}">
+                <a16:creationId xmlns:a16="http://schemas.microsoft.com/office/drawing/2014/main" id="{B5F93256-3DCD-68C8-6FE8-D5245F19349B}"/>
+              </a:ext>
+            </a:extLst>
+          </p:cNvPr>
+          <p:cNvSpPr/>
+          <p:nvPr/>
+        </p:nvSpPr>
+        <p:spPr>
+          <a:xfrm>
+            <a:off x="107505" y="3170974"/>
+            <a:ext cx="970252" cy="427639"/>
+          </a:xfrm>
+          <a:prstGeom prst="roundRect">
+            <a:avLst>
+              <a:gd name="adj" fmla="val 12191"/>
+            </a:avLst>
+          </a:prstGeom>
+          <a:noFill/>
+          <a:ln w="12700"/>
+        </p:spPr>
+        <p:style>
+          <a:lnRef idx="2">
+            <a:schemeClr val="accent1">
+              <a:shade val="15000"/>
+            </a:schemeClr>
+          </a:lnRef>
+          <a:fillRef idx="1">
+            <a:schemeClr val="accent1"/>
+          </a:fillRef>
+          <a:effectRef idx="0">
+            <a:schemeClr val="accent1"/>
+          </a:effectRef>
+          <a:fontRef idx="minor">
+            <a:schemeClr val="lt1"/>
+          </a:fontRef>
+        </p:style>
+        <p:txBody>
+          <a:bodyPr rtlCol="0" anchor="ctr"/>
+          <a:lstStyle/>
+          <a:p>
+            <a:pPr algn="ctr"/>
+            <a:r>
+              <a:rPr kumimoji="1" lang="en-US" altLang="ko-KR" sz="800">
+                <a:solidFill>
+                  <a:schemeClr val="tx1"/>
+                </a:solidFill>
+              </a:rPr>
+              <a:t>Downstream</a:t>
+            </a:r>
+          </a:p>
+          <a:p>
+            <a:pPr algn="ctr"/>
+            <a:r>
+              <a:rPr kumimoji="1" lang="en-US" altLang="ko-KR" sz="800">
+                <a:solidFill>
+                  <a:schemeClr val="tx1"/>
+                </a:solidFill>
+              </a:rPr>
+              <a:t>(Client)</a:t>
+            </a:r>
+            <a:endParaRPr kumimoji="1" lang="ko-KR" altLang="en-US" sz="800">
+              <a:solidFill>
+                <a:schemeClr val="tx1"/>
+              </a:solidFill>
+            </a:endParaRPr>
+          </a:p>
+        </p:txBody>
+      </p:sp>
+      <p:sp>
+        <p:nvSpPr>
+          <p:cNvPr id="4" name="모서리가 둥근 직사각형 3">
+            <a:extLst>
+              <a:ext uri="{FF2B5EF4-FFF2-40B4-BE49-F238E27FC236}">
+                <a16:creationId xmlns:a16="http://schemas.microsoft.com/office/drawing/2014/main" id="{5DA8C20A-DB2C-8705-7D7B-102D5FEDC15A}"/>
+              </a:ext>
+            </a:extLst>
+          </p:cNvPr>
+          <p:cNvSpPr/>
+          <p:nvPr/>
+        </p:nvSpPr>
+        <p:spPr>
+          <a:xfrm>
+            <a:off x="1475656" y="881974"/>
+            <a:ext cx="6120680" cy="3443592"/>
+          </a:xfrm>
+          <a:prstGeom prst="roundRect">
+            <a:avLst>
+              <a:gd name="adj" fmla="val 5395"/>
+            </a:avLst>
+          </a:prstGeom>
+          <a:solidFill>
+            <a:schemeClr val="bg1"/>
+          </a:solidFill>
+          <a:ln w="12700"/>
+        </p:spPr>
+        <p:style>
+          <a:lnRef idx="2">
+            <a:schemeClr val="accent1">
+              <a:shade val="15000"/>
+            </a:schemeClr>
+          </a:lnRef>
+          <a:fillRef idx="1">
+            <a:schemeClr val="accent1"/>
+          </a:fillRef>
+          <a:effectRef idx="0">
+            <a:schemeClr val="accent1"/>
+          </a:effectRef>
+          <a:fontRef idx="minor">
+            <a:schemeClr val="lt1"/>
+          </a:fontRef>
+        </p:style>
+        <p:txBody>
+          <a:bodyPr rtlCol="0" anchor="b"/>
+          <a:lstStyle/>
+          <a:p>
+            <a:r>
+              <a:rPr kumimoji="1" lang="en-US" altLang="ko-KR" sz="900" b="1">
+                <a:solidFill>
+                  <a:schemeClr val="tx1"/>
+                </a:solidFill>
+              </a:rPr>
+              <a:t>Worker Thread</a:t>
+            </a:r>
+            <a:endParaRPr kumimoji="1" lang="ko-KR" altLang="en-US" sz="900" b="1">
+              <a:solidFill>
+                <a:schemeClr val="tx1"/>
+              </a:solidFill>
+            </a:endParaRPr>
+          </a:p>
+        </p:txBody>
+      </p:sp>
+      <p:sp>
+        <p:nvSpPr>
+          <p:cNvPr id="5" name="모서리가 둥근 직사각형 4">
+            <a:extLst>
+              <a:ext uri="{FF2B5EF4-FFF2-40B4-BE49-F238E27FC236}">
+                <a16:creationId xmlns:a16="http://schemas.microsoft.com/office/drawing/2014/main" id="{3ED785C6-3C8A-CE92-8DFE-CA318ADFD565}"/>
+              </a:ext>
+            </a:extLst>
+          </p:cNvPr>
+          <p:cNvSpPr/>
+          <p:nvPr/>
+        </p:nvSpPr>
+        <p:spPr>
+          <a:xfrm>
+            <a:off x="1619673" y="2491838"/>
+            <a:ext cx="1052864" cy="306783"/>
+          </a:xfrm>
+          <a:prstGeom prst="roundRect">
+            <a:avLst>
+              <a:gd name="adj" fmla="val 12191"/>
+            </a:avLst>
+          </a:prstGeom>
+          <a:noFill/>
+          <a:ln w="12700"/>
+        </p:spPr>
+        <p:style>
+          <a:lnRef idx="2">
+            <a:schemeClr val="accent1">
+              <a:shade val="15000"/>
+            </a:schemeClr>
+          </a:lnRef>
+          <a:fillRef idx="1">
+            <a:schemeClr val="accent1"/>
+          </a:fillRef>
+          <a:effectRef idx="0">
+            <a:schemeClr val="accent1"/>
+          </a:effectRef>
+          <a:fontRef idx="minor">
+            <a:schemeClr val="lt1"/>
+          </a:fontRef>
+        </p:style>
+        <p:txBody>
+          <a:bodyPr rtlCol="0" anchor="ctr"/>
+          <a:lstStyle/>
+          <a:p>
+            <a:pPr algn="ctr"/>
+            <a:r>
+              <a:rPr kumimoji="1" lang="en-US" altLang="ko-KR" sz="800">
+                <a:solidFill>
+                  <a:schemeClr val="tx1"/>
+                </a:solidFill>
+              </a:rPr>
+              <a:t>Listener</a:t>
+            </a:r>
+          </a:p>
+          <a:p>
+            <a:pPr algn="ctr"/>
+            <a:r>
+              <a:rPr kumimoji="1" lang="en-US" altLang="ko-KR" sz="800">
+                <a:solidFill>
+                  <a:schemeClr val="tx1"/>
+                </a:solidFill>
+              </a:rPr>
+              <a:t>(accept())</a:t>
+            </a:r>
+            <a:endParaRPr kumimoji="1" lang="ko-KR" altLang="en-US" sz="800">
+              <a:solidFill>
+                <a:schemeClr val="tx1"/>
+              </a:solidFill>
+            </a:endParaRPr>
+          </a:p>
+        </p:txBody>
+      </p:sp>
+      <p:sp>
+        <p:nvSpPr>
+          <p:cNvPr id="6" name="모서리가 둥근 직사각형 5">
+            <a:extLst>
+              <a:ext uri="{FF2B5EF4-FFF2-40B4-BE49-F238E27FC236}">
+                <a16:creationId xmlns:a16="http://schemas.microsoft.com/office/drawing/2014/main" id="{BADB9E6C-3F87-E8B8-76E4-CFC355C6B994}"/>
+              </a:ext>
+            </a:extLst>
+          </p:cNvPr>
+          <p:cNvSpPr/>
+          <p:nvPr/>
+        </p:nvSpPr>
+        <p:spPr>
+          <a:xfrm>
+            <a:off x="1619673" y="3169508"/>
+            <a:ext cx="1052864" cy="427640"/>
+          </a:xfrm>
+          <a:prstGeom prst="roundRect">
+            <a:avLst>
+              <a:gd name="adj" fmla="val 14972"/>
+            </a:avLst>
+          </a:prstGeom>
+          <a:solidFill>
+            <a:schemeClr val="bg1">
+              <a:lumMod val="95000"/>
+            </a:schemeClr>
+          </a:solidFill>
+          <a:ln w="12700"/>
+        </p:spPr>
+        <p:style>
+          <a:lnRef idx="2">
+            <a:schemeClr val="accent1">
+              <a:shade val="15000"/>
+            </a:schemeClr>
+          </a:lnRef>
+          <a:fillRef idx="1">
+            <a:schemeClr val="accent1"/>
+          </a:fillRef>
+          <a:effectRef idx="0">
+            <a:schemeClr val="accent1"/>
+          </a:effectRef>
+          <a:fontRef idx="minor">
+            <a:schemeClr val="lt1"/>
+          </a:fontRef>
+        </p:style>
+        <p:txBody>
+          <a:bodyPr rtlCol="0" anchor="ctr"/>
+          <a:lstStyle/>
+          <a:p>
+            <a:pPr algn="ctr"/>
+            <a:r>
+              <a:rPr kumimoji="1" lang="en-US" altLang="ko-KR" sz="800" b="1">
+                <a:solidFill>
+                  <a:schemeClr val="tx1"/>
+                </a:solidFill>
+              </a:rPr>
+              <a:t>Dispatcher</a:t>
+            </a:r>
+          </a:p>
+        </p:txBody>
+      </p:sp>
+      <p:cxnSp>
+        <p:nvCxnSpPr>
+          <p:cNvPr id="8" name="직선 화살표 연결선 7">
+            <a:extLst>
+              <a:ext uri="{FF2B5EF4-FFF2-40B4-BE49-F238E27FC236}">
+                <a16:creationId xmlns:a16="http://schemas.microsoft.com/office/drawing/2014/main" id="{A70D10FD-0180-C2D0-535B-EF47408DD6A4}"/>
+              </a:ext>
+            </a:extLst>
+          </p:cNvPr>
+          <p:cNvCxnSpPr>
+            <a:cxnSpLocks/>
+          </p:cNvCxnSpPr>
+          <p:nvPr/>
+        </p:nvCxnSpPr>
+        <p:spPr>
+          <a:xfrm>
+            <a:off x="1077757" y="3219822"/>
+            <a:ext cx="541916" cy="0"/>
+          </a:xfrm>
+          <a:prstGeom prst="straightConnector1">
+            <a:avLst/>
+          </a:prstGeom>
+          <a:ln w="12700">
+            <a:solidFill>
+              <a:schemeClr val="accent1"/>
+            </a:solidFill>
+            <a:tailEnd type="triangle"/>
+          </a:ln>
+        </p:spPr>
+        <p:style>
+          <a:lnRef idx="1">
+            <a:schemeClr val="accent1"/>
+          </a:lnRef>
+          <a:fillRef idx="0">
+            <a:schemeClr val="accent1"/>
+          </a:fillRef>
+          <a:effectRef idx="0">
+            <a:schemeClr val="accent1"/>
+          </a:effectRef>
+          <a:fontRef idx="minor">
+            <a:schemeClr val="tx1"/>
+          </a:fontRef>
+        </p:style>
+      </p:cxnSp>
+      <p:cxnSp>
+        <p:nvCxnSpPr>
+          <p:cNvPr id="16" name="직선 화살표 연결선 15">
+            <a:extLst>
+              <a:ext uri="{FF2B5EF4-FFF2-40B4-BE49-F238E27FC236}">
+                <a16:creationId xmlns:a16="http://schemas.microsoft.com/office/drawing/2014/main" id="{493CFF7F-E503-FAD7-9EDF-AD028891C67C}"/>
+              </a:ext>
+            </a:extLst>
+          </p:cNvPr>
+          <p:cNvCxnSpPr>
+            <a:cxnSpLocks/>
+          </p:cNvCxnSpPr>
+          <p:nvPr/>
+        </p:nvCxnSpPr>
+        <p:spPr>
+          <a:xfrm flipV="1">
+            <a:off x="2074097" y="2798621"/>
+            <a:ext cx="0" cy="370887"/>
+          </a:xfrm>
+          <a:prstGeom prst="straightConnector1">
+            <a:avLst/>
+          </a:prstGeom>
+          <a:ln w="12700">
+            <a:solidFill>
+              <a:schemeClr val="accent1"/>
+            </a:solidFill>
+            <a:tailEnd type="triangle"/>
+          </a:ln>
+        </p:spPr>
+        <p:style>
+          <a:lnRef idx="1">
+            <a:schemeClr val="accent1"/>
+          </a:lnRef>
+          <a:fillRef idx="0">
+            <a:schemeClr val="accent1"/>
+          </a:fillRef>
+          <a:effectRef idx="0">
+            <a:schemeClr val="accent1"/>
+          </a:effectRef>
+          <a:fontRef idx="minor">
+            <a:schemeClr val="tx1"/>
+          </a:fontRef>
+        </p:style>
+      </p:cxnSp>
+      <p:cxnSp>
+        <p:nvCxnSpPr>
+          <p:cNvPr id="23" name="직선 화살표 연결선 22">
+            <a:extLst>
+              <a:ext uri="{FF2B5EF4-FFF2-40B4-BE49-F238E27FC236}">
+                <a16:creationId xmlns:a16="http://schemas.microsoft.com/office/drawing/2014/main" id="{64DBFED8-76FB-331C-CFBF-AB9D3C0F1BE7}"/>
+              </a:ext>
+            </a:extLst>
+          </p:cNvPr>
+          <p:cNvCxnSpPr>
+            <a:cxnSpLocks/>
+          </p:cNvCxnSpPr>
+          <p:nvPr/>
+        </p:nvCxnSpPr>
+        <p:spPr>
+          <a:xfrm flipH="1">
+            <a:off x="1077757" y="3311320"/>
+            <a:ext cx="541916" cy="1466"/>
+          </a:xfrm>
+          <a:prstGeom prst="straightConnector1">
+            <a:avLst/>
+          </a:prstGeom>
+          <a:ln w="12700">
+            <a:solidFill>
+              <a:schemeClr val="accent1"/>
+            </a:solidFill>
+            <a:tailEnd type="triangle"/>
+          </a:ln>
+        </p:spPr>
+        <p:style>
+          <a:lnRef idx="1">
+            <a:schemeClr val="accent1"/>
+          </a:lnRef>
+          <a:fillRef idx="0">
+            <a:schemeClr val="accent1"/>
+          </a:fillRef>
+          <a:effectRef idx="0">
+            <a:schemeClr val="accent1"/>
+          </a:effectRef>
+          <a:fontRef idx="minor">
+            <a:schemeClr val="tx1"/>
+          </a:fontRef>
+        </p:style>
+      </p:cxnSp>
+      <p:sp>
+        <p:nvSpPr>
+          <p:cNvPr id="30" name="모서리가 둥근 직사각형 29">
+            <a:extLst>
+              <a:ext uri="{FF2B5EF4-FFF2-40B4-BE49-F238E27FC236}">
+                <a16:creationId xmlns:a16="http://schemas.microsoft.com/office/drawing/2014/main" id="{2A8A2A97-F9A7-3F9A-0FA7-0636D3D6FE84}"/>
+              </a:ext>
+            </a:extLst>
+          </p:cNvPr>
+          <p:cNvSpPr/>
+          <p:nvPr/>
+        </p:nvSpPr>
+        <p:spPr>
+          <a:xfrm>
+            <a:off x="7668344" y="1131590"/>
+            <a:ext cx="1052864" cy="306783"/>
+          </a:xfrm>
+          <a:prstGeom prst="roundRect">
+            <a:avLst>
+              <a:gd name="adj" fmla="val 12191"/>
+            </a:avLst>
+          </a:prstGeom>
+          <a:noFill/>
+          <a:ln w="12700"/>
+        </p:spPr>
+        <p:style>
+          <a:lnRef idx="2">
+            <a:schemeClr val="accent1">
+              <a:shade val="15000"/>
+            </a:schemeClr>
+          </a:lnRef>
+          <a:fillRef idx="1">
+            <a:schemeClr val="accent1"/>
+          </a:fillRef>
+          <a:effectRef idx="0">
+            <a:schemeClr val="accent1"/>
+          </a:effectRef>
+          <a:fontRef idx="minor">
+            <a:schemeClr val="lt1"/>
+          </a:fontRef>
+        </p:style>
+        <p:txBody>
+          <a:bodyPr rtlCol="0" anchor="ctr"/>
+          <a:lstStyle/>
+          <a:p>
+            <a:pPr algn="ctr"/>
+            <a:r>
+              <a:rPr kumimoji="1" lang="en-US" altLang="ko-KR" sz="800">
+                <a:solidFill>
+                  <a:schemeClr val="tx1"/>
+                </a:solidFill>
+              </a:rPr>
+              <a:t>Filter Chain Manager</a:t>
+            </a:r>
+            <a:endParaRPr kumimoji="1" lang="ko-KR" altLang="en-US" sz="800">
+              <a:solidFill>
+                <a:schemeClr val="tx1"/>
+              </a:solidFill>
+            </a:endParaRPr>
+          </a:p>
+        </p:txBody>
+      </p:sp>
+      <p:cxnSp>
+        <p:nvCxnSpPr>
+          <p:cNvPr id="31" name="직선 화살표 연결선 30">
+            <a:extLst>
+              <a:ext uri="{FF2B5EF4-FFF2-40B4-BE49-F238E27FC236}">
+                <a16:creationId xmlns:a16="http://schemas.microsoft.com/office/drawing/2014/main" id="{456049CA-843D-A9B5-13F5-5EC70C2C72F0}"/>
+              </a:ext>
+            </a:extLst>
+          </p:cNvPr>
+          <p:cNvCxnSpPr>
+            <a:cxnSpLocks/>
+          </p:cNvCxnSpPr>
+          <p:nvPr/>
+        </p:nvCxnSpPr>
+        <p:spPr>
+          <a:xfrm>
+            <a:off x="2195737" y="2798621"/>
+            <a:ext cx="0" cy="370887"/>
+          </a:xfrm>
+          <a:prstGeom prst="straightConnector1">
+            <a:avLst/>
+          </a:prstGeom>
+          <a:ln w="12700">
+            <a:solidFill>
+              <a:schemeClr val="accent1"/>
+            </a:solidFill>
+            <a:tailEnd type="triangle"/>
+          </a:ln>
+        </p:spPr>
+        <p:style>
+          <a:lnRef idx="1">
+            <a:schemeClr val="accent1"/>
+          </a:lnRef>
+          <a:fillRef idx="0">
+            <a:schemeClr val="accent1"/>
+          </a:fillRef>
+          <a:effectRef idx="0">
+            <a:schemeClr val="accent1"/>
+          </a:effectRef>
+          <a:fontRef idx="minor">
+            <a:schemeClr val="tx1"/>
+          </a:fontRef>
+        </p:style>
+      </p:cxnSp>
+      <p:sp>
+        <p:nvSpPr>
+          <p:cNvPr id="37" name="모서리가 둥근 직사각형 36">
+            <a:extLst>
+              <a:ext uri="{FF2B5EF4-FFF2-40B4-BE49-F238E27FC236}">
+                <a16:creationId xmlns:a16="http://schemas.microsoft.com/office/drawing/2014/main" id="{DF9D902F-68EE-9055-D9F4-CCAF191817BB}"/>
+              </a:ext>
+            </a:extLst>
+          </p:cNvPr>
+          <p:cNvSpPr/>
+          <p:nvPr/>
+        </p:nvSpPr>
+        <p:spPr>
+          <a:xfrm>
+            <a:off x="3070436" y="968666"/>
+            <a:ext cx="4477732" cy="3691315"/>
+          </a:xfrm>
+          <a:prstGeom prst="roundRect">
+            <a:avLst>
+              <a:gd name="adj" fmla="val 3704"/>
+            </a:avLst>
+          </a:prstGeom>
+          <a:solidFill>
+            <a:schemeClr val="bg1">
+              <a:lumMod val="95000"/>
+            </a:schemeClr>
+          </a:solidFill>
+          <a:ln w="12700">
+            <a:prstDash val="dash"/>
+          </a:ln>
+        </p:spPr>
+        <p:style>
+          <a:lnRef idx="2">
+            <a:schemeClr val="accent1">
+              <a:shade val="15000"/>
+            </a:schemeClr>
+          </a:lnRef>
+          <a:fillRef idx="1">
+            <a:schemeClr val="accent1"/>
+          </a:fillRef>
+          <a:effectRef idx="0">
+            <a:schemeClr val="accent1"/>
+          </a:effectRef>
+          <a:fontRef idx="minor">
+            <a:schemeClr val="lt1"/>
+          </a:fontRef>
+        </p:style>
+        <p:txBody>
+          <a:bodyPr rtlCol="0" anchor="t"/>
+          <a:lstStyle/>
+          <a:p>
+            <a:pPr algn="ctr"/>
+            <a:r>
+              <a:rPr kumimoji="1" lang="en-US" altLang="ko-KR" sz="900" b="1" u="sng">
+                <a:solidFill>
+                  <a:schemeClr val="tx1"/>
+                </a:solidFill>
+              </a:rPr>
+              <a:t>Per Downstream Connection</a:t>
+            </a:r>
+            <a:r>
+              <a:rPr kumimoji="1" lang="en-US" altLang="ko-KR" sz="900">
+                <a:solidFill>
+                  <a:schemeClr val="tx1"/>
+                </a:solidFill>
+              </a:rPr>
+              <a:t> Instances</a:t>
+            </a:r>
+            <a:endParaRPr kumimoji="1" lang="ko-KR" altLang="en-US" sz="900">
+              <a:solidFill>
+                <a:schemeClr val="tx1"/>
+              </a:solidFill>
+            </a:endParaRPr>
+          </a:p>
+        </p:txBody>
+      </p:sp>
+      <p:sp>
+        <p:nvSpPr>
+          <p:cNvPr id="7" name="모서리가 둥근 직사각형 6">
+            <a:extLst>
+              <a:ext uri="{FF2B5EF4-FFF2-40B4-BE49-F238E27FC236}">
+                <a16:creationId xmlns:a16="http://schemas.microsoft.com/office/drawing/2014/main" id="{6CDD750D-C835-365A-DEAC-B50D0A70CB1E}"/>
+              </a:ext>
+            </a:extLst>
+          </p:cNvPr>
+          <p:cNvSpPr/>
+          <p:nvPr/>
+        </p:nvSpPr>
+        <p:spPr>
+          <a:xfrm>
+            <a:off x="3159784" y="1274889"/>
+            <a:ext cx="3140408" cy="639298"/>
+          </a:xfrm>
+          <a:prstGeom prst="roundRect">
+            <a:avLst>
+              <a:gd name="adj" fmla="val 6920"/>
+            </a:avLst>
+          </a:prstGeom>
+          <a:solidFill>
+            <a:schemeClr val="bg2">
+              <a:lumMod val="90000"/>
+            </a:schemeClr>
+          </a:solidFill>
+          <a:ln w="12700">
+            <a:prstDash val="dash"/>
+          </a:ln>
+        </p:spPr>
+        <p:style>
+          <a:lnRef idx="2">
+            <a:schemeClr val="accent1">
+              <a:shade val="15000"/>
+            </a:schemeClr>
+          </a:lnRef>
+          <a:fillRef idx="1">
+            <a:schemeClr val="accent1"/>
+          </a:fillRef>
+          <a:effectRef idx="0">
+            <a:schemeClr val="accent1"/>
+          </a:effectRef>
+          <a:fontRef idx="minor">
+            <a:schemeClr val="lt1"/>
+          </a:fontRef>
+        </p:style>
+        <p:txBody>
+          <a:bodyPr rtlCol="0" anchor="t"/>
+          <a:lstStyle/>
+          <a:p>
+            <a:pPr algn="ctr"/>
+            <a:r>
+              <a:rPr kumimoji="1" lang="en-US" altLang="ko-KR" sz="900">
+                <a:solidFill>
+                  <a:schemeClr val="tx1"/>
+                </a:solidFill>
+              </a:rPr>
+              <a:t>Listener Filters</a:t>
+            </a:r>
+            <a:endParaRPr kumimoji="1" lang="ko-KR" altLang="en-US" sz="900">
+              <a:solidFill>
+                <a:schemeClr val="tx1"/>
+              </a:solidFill>
+            </a:endParaRPr>
+          </a:p>
+        </p:txBody>
+      </p:sp>
+      <p:sp>
+        <p:nvSpPr>
+          <p:cNvPr id="41" name="모서리가 둥근 직사각형 40">
+            <a:extLst>
+              <a:ext uri="{FF2B5EF4-FFF2-40B4-BE49-F238E27FC236}">
+                <a16:creationId xmlns:a16="http://schemas.microsoft.com/office/drawing/2014/main" id="{AFC38AA7-63DB-3D1F-3C73-ABF6BBD5F81D}"/>
+              </a:ext>
+            </a:extLst>
+          </p:cNvPr>
+          <p:cNvSpPr/>
+          <p:nvPr/>
+        </p:nvSpPr>
+        <p:spPr>
+          <a:xfrm>
+            <a:off x="3159784" y="2238522"/>
+            <a:ext cx="3644464" cy="2339645"/>
+          </a:xfrm>
+          <a:prstGeom prst="roundRect">
+            <a:avLst>
+              <a:gd name="adj" fmla="val 6920"/>
+            </a:avLst>
+          </a:prstGeom>
+          <a:solidFill>
+            <a:schemeClr val="bg2">
+              <a:lumMod val="90000"/>
+            </a:schemeClr>
+          </a:solidFill>
+          <a:ln w="12700">
+            <a:prstDash val="dash"/>
+          </a:ln>
+        </p:spPr>
+        <p:style>
+          <a:lnRef idx="2">
+            <a:schemeClr val="accent1">
+              <a:shade val="15000"/>
+            </a:schemeClr>
+          </a:lnRef>
+          <a:fillRef idx="1">
+            <a:schemeClr val="accent1"/>
+          </a:fillRef>
+          <a:effectRef idx="0">
+            <a:schemeClr val="accent1"/>
+          </a:effectRef>
+          <a:fontRef idx="minor">
+            <a:schemeClr val="lt1"/>
+          </a:fontRef>
+        </p:style>
+        <p:txBody>
+          <a:bodyPr rtlCol="0" anchor="t"/>
+          <a:lstStyle/>
+          <a:p>
+            <a:pPr algn="ctr"/>
+            <a:r>
+              <a:rPr kumimoji="1" lang="en-US" altLang="ko-KR" sz="900">
+                <a:solidFill>
+                  <a:schemeClr val="tx1"/>
+                </a:solidFill>
+              </a:rPr>
+              <a:t>Network Filters</a:t>
+            </a:r>
+            <a:endParaRPr kumimoji="1" lang="ko-KR" altLang="en-US" sz="900">
+              <a:solidFill>
+                <a:schemeClr val="tx1"/>
+              </a:solidFill>
+            </a:endParaRPr>
+          </a:p>
+        </p:txBody>
+      </p:sp>
+      <p:sp>
+        <p:nvSpPr>
+          <p:cNvPr id="42" name="모서리가 둥근 직사각형 41">
+            <a:extLst>
+              <a:ext uri="{FF2B5EF4-FFF2-40B4-BE49-F238E27FC236}">
+                <a16:creationId xmlns:a16="http://schemas.microsoft.com/office/drawing/2014/main" id="{AAE05885-4B05-A40D-0A2C-1B67CBB59800}"/>
+              </a:ext>
+            </a:extLst>
+          </p:cNvPr>
+          <p:cNvSpPr/>
+          <p:nvPr/>
+        </p:nvSpPr>
+        <p:spPr>
+          <a:xfrm>
+            <a:off x="3247153" y="3082627"/>
+            <a:ext cx="3479802" cy="1386267"/>
+          </a:xfrm>
+          <a:prstGeom prst="roundRect">
+            <a:avLst>
+              <a:gd name="adj" fmla="val 6974"/>
+            </a:avLst>
+          </a:prstGeom>
+          <a:solidFill>
+            <a:schemeClr val="bg1"/>
+          </a:solidFill>
+          <a:ln w="12700"/>
+        </p:spPr>
+        <p:style>
+          <a:lnRef idx="2">
+            <a:schemeClr val="accent1">
+              <a:shade val="15000"/>
+            </a:schemeClr>
+          </a:lnRef>
+          <a:fillRef idx="1">
+            <a:schemeClr val="accent1"/>
+          </a:fillRef>
+          <a:effectRef idx="0">
+            <a:schemeClr val="accent1"/>
+          </a:effectRef>
+          <a:fontRef idx="minor">
+            <a:schemeClr val="lt1"/>
+          </a:fontRef>
+        </p:style>
+        <p:txBody>
+          <a:bodyPr rtlCol="0" anchor="t"/>
+          <a:lstStyle/>
+          <a:p>
+            <a:pPr algn="r"/>
+            <a:r>
+              <a:rPr kumimoji="1" lang="en-US" altLang="ko-KR" sz="800">
+                <a:solidFill>
+                  <a:schemeClr val="tx1"/>
+                </a:solidFill>
+              </a:rPr>
+              <a:t>HCM (HTTP Connection Manager)</a:t>
+            </a:r>
+            <a:endParaRPr kumimoji="1" lang="ko-KR" altLang="en-US" sz="800">
+              <a:solidFill>
+                <a:schemeClr val="tx1"/>
+              </a:solidFill>
+            </a:endParaRPr>
+          </a:p>
+        </p:txBody>
+      </p:sp>
+      <p:sp>
+        <p:nvSpPr>
+          <p:cNvPr id="43" name="모서리가 둥근 직사각형 42">
+            <a:extLst>
+              <a:ext uri="{FF2B5EF4-FFF2-40B4-BE49-F238E27FC236}">
+                <a16:creationId xmlns:a16="http://schemas.microsoft.com/office/drawing/2014/main" id="{18E80160-7F7D-0C05-EA7B-D73FD1FB0F3F}"/>
+              </a:ext>
+            </a:extLst>
+          </p:cNvPr>
+          <p:cNvSpPr/>
+          <p:nvPr/>
+        </p:nvSpPr>
+        <p:spPr>
+          <a:xfrm>
+            <a:off x="4939897" y="2507185"/>
+            <a:ext cx="801642" cy="306783"/>
+          </a:xfrm>
+          <a:prstGeom prst="roundRect">
+            <a:avLst>
+              <a:gd name="adj" fmla="val 19601"/>
+            </a:avLst>
+          </a:prstGeom>
+          <a:solidFill>
+            <a:schemeClr val="bg1"/>
+          </a:solidFill>
+          <a:ln w="12700"/>
+        </p:spPr>
+        <p:style>
+          <a:lnRef idx="2">
+            <a:schemeClr val="accent1">
+              <a:shade val="15000"/>
+            </a:schemeClr>
+          </a:lnRef>
+          <a:fillRef idx="1">
+            <a:schemeClr val="accent1"/>
+          </a:fillRef>
+          <a:effectRef idx="0">
+            <a:schemeClr val="accent1"/>
+          </a:effectRef>
+          <a:fontRef idx="minor">
+            <a:schemeClr val="lt1"/>
+          </a:fontRef>
+        </p:style>
+        <p:txBody>
+          <a:bodyPr rtlCol="0" anchor="ctr"/>
+          <a:lstStyle/>
+          <a:p>
+            <a:pPr algn="ctr"/>
+            <a:r>
+              <a:rPr kumimoji="1" lang="en-US" altLang="ko-KR" sz="800">
+                <a:solidFill>
+                  <a:schemeClr val="tx1"/>
+                </a:solidFill>
+              </a:rPr>
+              <a:t>RBAC (L4)</a:t>
+            </a:r>
+            <a:endParaRPr kumimoji="1" lang="ko-KR" altLang="en-US" sz="800">
+              <a:solidFill>
+                <a:schemeClr val="tx1"/>
+              </a:solidFill>
+            </a:endParaRPr>
+          </a:p>
+        </p:txBody>
+      </p:sp>
+      <p:sp>
+        <p:nvSpPr>
+          <p:cNvPr id="44" name="모서리가 둥근 직사각형 43">
+            <a:extLst>
+              <a:ext uri="{FF2B5EF4-FFF2-40B4-BE49-F238E27FC236}">
+                <a16:creationId xmlns:a16="http://schemas.microsoft.com/office/drawing/2014/main" id="{CDF8E74B-D6E2-1111-5F13-20C8CADF5AF7}"/>
+              </a:ext>
+            </a:extLst>
+          </p:cNvPr>
+          <p:cNvSpPr/>
+          <p:nvPr/>
+        </p:nvSpPr>
+        <p:spPr>
+          <a:xfrm>
+            <a:off x="3251265" y="2507184"/>
+            <a:ext cx="801642" cy="306783"/>
+          </a:xfrm>
+          <a:prstGeom prst="roundRect">
+            <a:avLst>
+              <a:gd name="adj" fmla="val 19601"/>
+            </a:avLst>
+          </a:prstGeom>
+          <a:solidFill>
+            <a:schemeClr val="bg1"/>
+          </a:solidFill>
+          <a:ln w="12700"/>
+        </p:spPr>
+        <p:style>
+          <a:lnRef idx="2">
+            <a:schemeClr val="accent1">
+              <a:shade val="15000"/>
+            </a:schemeClr>
+          </a:lnRef>
+          <a:fillRef idx="1">
+            <a:schemeClr val="accent1"/>
+          </a:fillRef>
+          <a:effectRef idx="0">
+            <a:schemeClr val="accent1"/>
+          </a:effectRef>
+          <a:fontRef idx="minor">
+            <a:schemeClr val="lt1"/>
+          </a:fontRef>
+        </p:style>
+        <p:txBody>
+          <a:bodyPr rtlCol="0" anchor="ctr"/>
+          <a:lstStyle/>
+          <a:p>
+            <a:pPr algn="ctr"/>
+            <a:r>
+              <a:rPr kumimoji="1" lang="en-US" altLang="ko-KR" sz="800">
+                <a:solidFill>
+                  <a:schemeClr val="tx1"/>
+                </a:solidFill>
+              </a:rPr>
+              <a:t>Connection</a:t>
+            </a:r>
+          </a:p>
+          <a:p>
+            <a:pPr algn="ctr"/>
+            <a:r>
+              <a:rPr kumimoji="1" lang="en-US" altLang="ko-KR" sz="800">
+                <a:solidFill>
+                  <a:schemeClr val="tx1"/>
+                </a:solidFill>
+              </a:rPr>
+              <a:t>Limit</a:t>
+            </a:r>
+            <a:endParaRPr kumimoji="1" lang="ko-KR" altLang="en-US" sz="800">
+              <a:solidFill>
+                <a:schemeClr val="tx1"/>
+              </a:solidFill>
+            </a:endParaRPr>
+          </a:p>
+        </p:txBody>
+      </p:sp>
+      <p:sp>
+        <p:nvSpPr>
+          <p:cNvPr id="45" name="모서리가 둥근 직사각형 44">
+            <a:extLst>
+              <a:ext uri="{FF2B5EF4-FFF2-40B4-BE49-F238E27FC236}">
+                <a16:creationId xmlns:a16="http://schemas.microsoft.com/office/drawing/2014/main" id="{5D172FD6-652C-001B-E842-4189B0730CC0}"/>
+              </a:ext>
+            </a:extLst>
+          </p:cNvPr>
+          <p:cNvSpPr/>
+          <p:nvPr/>
+        </p:nvSpPr>
+        <p:spPr>
+          <a:xfrm>
+            <a:off x="5921190" y="2507183"/>
+            <a:ext cx="801642" cy="306783"/>
+          </a:xfrm>
+          <a:prstGeom prst="roundRect">
+            <a:avLst>
+              <a:gd name="adj" fmla="val 19601"/>
+            </a:avLst>
+          </a:prstGeom>
+          <a:solidFill>
+            <a:schemeClr val="bg1"/>
+          </a:solidFill>
+          <a:ln w="12700"/>
+        </p:spPr>
+        <p:style>
+          <a:lnRef idx="2">
+            <a:schemeClr val="accent1">
+              <a:shade val="15000"/>
+            </a:schemeClr>
+          </a:lnRef>
+          <a:fillRef idx="1">
+            <a:schemeClr val="accent1"/>
+          </a:fillRef>
+          <a:effectRef idx="0">
+            <a:schemeClr val="accent1"/>
+          </a:effectRef>
+          <a:fontRef idx="minor">
+            <a:schemeClr val="lt1"/>
+          </a:fontRef>
+        </p:style>
+        <p:txBody>
+          <a:bodyPr rtlCol="0" anchor="ctr"/>
+          <a:lstStyle/>
+          <a:p>
+            <a:pPr algn="ctr"/>
+            <a:r>
+              <a:rPr kumimoji="1" lang="en-US" altLang="ko-KR" sz="800">
+                <a:solidFill>
+                  <a:schemeClr val="tx1"/>
+                </a:solidFill>
+              </a:rPr>
+              <a:t>Rate Limit</a:t>
+            </a:r>
+            <a:endParaRPr kumimoji="1" lang="ko-KR" altLang="en-US" sz="800">
+              <a:solidFill>
+                <a:schemeClr val="tx1"/>
+              </a:solidFill>
+            </a:endParaRPr>
+          </a:p>
+        </p:txBody>
+      </p:sp>
+      <p:sp>
+        <p:nvSpPr>
+          <p:cNvPr id="34" name="모서리가 둥근 직사각형 33">
+            <a:extLst>
+              <a:ext uri="{FF2B5EF4-FFF2-40B4-BE49-F238E27FC236}">
+                <a16:creationId xmlns:a16="http://schemas.microsoft.com/office/drawing/2014/main" id="{1AC94828-F6C3-384B-24BA-2EE5D7915A8A}"/>
+              </a:ext>
+            </a:extLst>
+          </p:cNvPr>
+          <p:cNvSpPr/>
+          <p:nvPr/>
+        </p:nvSpPr>
+        <p:spPr>
+          <a:xfrm>
+            <a:off x="5393044" y="1527491"/>
+            <a:ext cx="801642" cy="306783"/>
+          </a:xfrm>
+          <a:prstGeom prst="roundRect">
+            <a:avLst>
+              <a:gd name="adj" fmla="val 19601"/>
+            </a:avLst>
+          </a:prstGeom>
+          <a:solidFill>
+            <a:schemeClr val="bg1"/>
+          </a:solidFill>
+          <a:ln w="12700"/>
+        </p:spPr>
+        <p:style>
+          <a:lnRef idx="2">
+            <a:schemeClr val="accent1">
+              <a:shade val="15000"/>
+            </a:schemeClr>
+          </a:lnRef>
+          <a:fillRef idx="1">
+            <a:schemeClr val="accent1"/>
+          </a:fillRef>
+          <a:effectRef idx="0">
+            <a:schemeClr val="accent1"/>
+          </a:effectRef>
+          <a:fontRef idx="minor">
+            <a:schemeClr val="lt1"/>
+          </a:fontRef>
+        </p:style>
+        <p:txBody>
+          <a:bodyPr rtlCol="0" anchor="ctr"/>
+          <a:lstStyle/>
+          <a:p>
+            <a:pPr algn="ctr"/>
+            <a:r>
+              <a:rPr kumimoji="1" lang="en-US" altLang="ko-KR" sz="800">
+                <a:solidFill>
+                  <a:schemeClr val="tx1"/>
+                </a:solidFill>
+              </a:rPr>
+              <a:t>TLS Inspector</a:t>
+            </a:r>
+            <a:endParaRPr kumimoji="1" lang="ko-KR" altLang="en-US" sz="800">
+              <a:solidFill>
+                <a:schemeClr val="tx1"/>
+              </a:solidFill>
+            </a:endParaRPr>
+          </a:p>
+        </p:txBody>
+      </p:sp>
+      <p:sp>
+        <p:nvSpPr>
+          <p:cNvPr id="35" name="모서리가 둥근 직사각형 34">
+            <a:extLst>
+              <a:ext uri="{FF2B5EF4-FFF2-40B4-BE49-F238E27FC236}">
+                <a16:creationId xmlns:a16="http://schemas.microsoft.com/office/drawing/2014/main" id="{9B071102-B7EA-1BE6-64A4-01017E6D3067}"/>
+              </a:ext>
+            </a:extLst>
+          </p:cNvPr>
+          <p:cNvSpPr/>
+          <p:nvPr/>
+        </p:nvSpPr>
+        <p:spPr>
+          <a:xfrm>
+            <a:off x="4413808" y="1529255"/>
+            <a:ext cx="801642" cy="306783"/>
+          </a:xfrm>
+          <a:prstGeom prst="roundRect">
+            <a:avLst>
+              <a:gd name="adj" fmla="val 19601"/>
+            </a:avLst>
+          </a:prstGeom>
+          <a:solidFill>
+            <a:schemeClr val="bg1"/>
+          </a:solidFill>
+          <a:ln w="12700"/>
+        </p:spPr>
+        <p:style>
+          <a:lnRef idx="2">
+            <a:schemeClr val="accent1">
+              <a:shade val="15000"/>
+            </a:schemeClr>
+          </a:lnRef>
+          <a:fillRef idx="1">
+            <a:schemeClr val="accent1"/>
+          </a:fillRef>
+          <a:effectRef idx="0">
+            <a:schemeClr val="accent1"/>
+          </a:effectRef>
+          <a:fontRef idx="minor">
+            <a:schemeClr val="lt1"/>
+          </a:fontRef>
+        </p:style>
+        <p:txBody>
+          <a:bodyPr rtlCol="0" anchor="ctr"/>
+          <a:lstStyle/>
+          <a:p>
+            <a:pPr algn="ctr"/>
+            <a:r>
+              <a:rPr kumimoji="1" lang="en-US" altLang="ko-KR" sz="800">
+                <a:solidFill>
+                  <a:schemeClr val="tx1"/>
+                </a:solidFill>
+              </a:rPr>
+              <a:t>Proxy</a:t>
+            </a:r>
+          </a:p>
+          <a:p>
+            <a:pPr algn="ctr"/>
+            <a:r>
+              <a:rPr kumimoji="1" lang="en-US" altLang="ko-KR" sz="800">
+                <a:solidFill>
+                  <a:schemeClr val="tx1"/>
+                </a:solidFill>
+              </a:rPr>
+              <a:t>Protocol</a:t>
+            </a:r>
+            <a:endParaRPr kumimoji="1" lang="ko-KR" altLang="en-US" sz="800">
+              <a:solidFill>
+                <a:schemeClr val="tx1"/>
+              </a:solidFill>
+            </a:endParaRPr>
+          </a:p>
+        </p:txBody>
+      </p:sp>
+      <p:sp>
+        <p:nvSpPr>
+          <p:cNvPr id="36" name="모서리가 둥근 직사각형 35">
+            <a:extLst>
+              <a:ext uri="{FF2B5EF4-FFF2-40B4-BE49-F238E27FC236}">
+                <a16:creationId xmlns:a16="http://schemas.microsoft.com/office/drawing/2014/main" id="{EB449BD2-61FD-BE97-3B38-E509AD85F8E4}"/>
+              </a:ext>
+            </a:extLst>
+          </p:cNvPr>
+          <p:cNvSpPr/>
+          <p:nvPr/>
+        </p:nvSpPr>
+        <p:spPr>
+          <a:xfrm>
+            <a:off x="3256384" y="1529255"/>
+            <a:ext cx="801642" cy="306783"/>
+          </a:xfrm>
+          <a:prstGeom prst="roundRect">
+            <a:avLst>
+              <a:gd name="adj" fmla="val 19601"/>
+            </a:avLst>
+          </a:prstGeom>
+          <a:solidFill>
+            <a:schemeClr val="bg1"/>
+          </a:solidFill>
+          <a:ln w="12700"/>
+        </p:spPr>
+        <p:style>
+          <a:lnRef idx="2">
+            <a:schemeClr val="accent1">
+              <a:shade val="15000"/>
+            </a:schemeClr>
+          </a:lnRef>
+          <a:fillRef idx="1">
+            <a:schemeClr val="accent1"/>
+          </a:fillRef>
+          <a:effectRef idx="0">
+            <a:schemeClr val="accent1"/>
+          </a:effectRef>
+          <a:fontRef idx="minor">
+            <a:schemeClr val="lt1"/>
+          </a:fontRef>
+        </p:style>
+        <p:txBody>
+          <a:bodyPr rtlCol="0" anchor="ctr"/>
+          <a:lstStyle/>
+          <a:p>
+            <a:pPr algn="ctr"/>
+            <a:r>
+              <a:rPr kumimoji="1" lang="en-US" altLang="ko-KR" sz="800">
+                <a:solidFill>
+                  <a:schemeClr val="tx1"/>
+                </a:solidFill>
+              </a:rPr>
+              <a:t>Original</a:t>
+            </a:r>
+          </a:p>
+          <a:p>
+            <a:pPr algn="ctr"/>
+            <a:r>
+              <a:rPr kumimoji="1" lang="en-US" altLang="ko-KR" sz="800">
+                <a:solidFill>
+                  <a:schemeClr val="tx1"/>
+                </a:solidFill>
+              </a:rPr>
+              <a:t>Dst</a:t>
+            </a:r>
+            <a:endParaRPr kumimoji="1" lang="ko-KR" altLang="en-US" sz="800">
+              <a:solidFill>
+                <a:schemeClr val="tx1"/>
+              </a:solidFill>
+            </a:endParaRPr>
+          </a:p>
+        </p:txBody>
+      </p:sp>
+      <p:sp>
+        <p:nvSpPr>
+          <p:cNvPr id="47" name="모서리가 둥근 직사각형 46">
+            <a:extLst>
+              <a:ext uri="{FF2B5EF4-FFF2-40B4-BE49-F238E27FC236}">
+                <a16:creationId xmlns:a16="http://schemas.microsoft.com/office/drawing/2014/main" id="{58B8749D-2B1A-D93B-4A3C-79B70FDBCC0D}"/>
+              </a:ext>
+            </a:extLst>
+          </p:cNvPr>
+          <p:cNvSpPr/>
+          <p:nvPr/>
+        </p:nvSpPr>
+        <p:spPr>
+          <a:xfrm>
+            <a:off x="3337192" y="3169508"/>
+            <a:ext cx="1225699" cy="306783"/>
+          </a:xfrm>
+          <a:prstGeom prst="roundRect">
+            <a:avLst>
+              <a:gd name="adj" fmla="val 19601"/>
+            </a:avLst>
+          </a:prstGeom>
+          <a:solidFill>
+            <a:schemeClr val="bg1"/>
+          </a:solidFill>
+          <a:ln w="12700"/>
+        </p:spPr>
+        <p:style>
+          <a:lnRef idx="2">
+            <a:schemeClr val="accent1">
+              <a:shade val="15000"/>
+            </a:schemeClr>
+          </a:lnRef>
+          <a:fillRef idx="1">
+            <a:schemeClr val="accent1"/>
+          </a:fillRef>
+          <a:effectRef idx="0">
+            <a:schemeClr val="accent1"/>
+          </a:effectRef>
+          <a:fontRef idx="minor">
+            <a:schemeClr val="lt1"/>
+          </a:fontRef>
+        </p:style>
+        <p:txBody>
+          <a:bodyPr rtlCol="0" anchor="ctr"/>
+          <a:lstStyle/>
+          <a:p>
+            <a:pPr algn="ctr"/>
+            <a:r>
+              <a:rPr kumimoji="1" lang="en-US" altLang="ko-KR" sz="800">
+                <a:solidFill>
+                  <a:schemeClr val="tx1"/>
+                </a:solidFill>
+              </a:rPr>
+              <a:t>HTTP Codec</a:t>
+            </a:r>
+            <a:endParaRPr kumimoji="1" lang="ko-KR" altLang="en-US" sz="800">
+              <a:solidFill>
+                <a:schemeClr val="tx1"/>
+              </a:solidFill>
+            </a:endParaRPr>
+          </a:p>
+        </p:txBody>
+      </p:sp>
+      <p:sp>
+        <p:nvSpPr>
+          <p:cNvPr id="38" name="타원 37">
+            <a:extLst>
+              <a:ext uri="{FF2B5EF4-FFF2-40B4-BE49-F238E27FC236}">
+                <a16:creationId xmlns:a16="http://schemas.microsoft.com/office/drawing/2014/main" id="{E08EF826-0282-C06E-791F-CFC9F28D11CA}"/>
+              </a:ext>
+            </a:extLst>
+          </p:cNvPr>
+          <p:cNvSpPr/>
+          <p:nvPr/>
+        </p:nvSpPr>
+        <p:spPr>
+          <a:xfrm flipH="1" flipV="1">
+            <a:off x="4112995" y="1658022"/>
+            <a:ext cx="51681" cy="45719"/>
+          </a:xfrm>
+          <a:prstGeom prst="ellipse">
+            <a:avLst/>
+          </a:prstGeom>
+          <a:solidFill>
+            <a:schemeClr val="tx1"/>
+          </a:solidFill>
+          <a:ln>
+            <a:noFill/>
+          </a:ln>
+        </p:spPr>
+        <p:style>
+          <a:lnRef idx="2">
+            <a:schemeClr val="accent1">
+              <a:shade val="15000"/>
+            </a:schemeClr>
+          </a:lnRef>
+          <a:fillRef idx="1">
+            <a:schemeClr val="accent1"/>
+          </a:fillRef>
+          <a:effectRef idx="0">
+            <a:schemeClr val="accent1"/>
+          </a:effectRef>
+          <a:fontRef idx="minor">
+            <a:schemeClr val="lt1"/>
+          </a:fontRef>
+        </p:style>
+        <p:txBody>
+          <a:bodyPr rtlCol="0" anchor="ctr"/>
+          <a:lstStyle/>
+          <a:p>
+            <a:pPr algn="ctr"/>
+            <a:endParaRPr kumimoji="1" lang="ko-KR" altLang="en-US"/>
+          </a:p>
+        </p:txBody>
+      </p:sp>
+      <p:sp>
+        <p:nvSpPr>
+          <p:cNvPr id="39" name="타원 38">
+            <a:extLst>
+              <a:ext uri="{FF2B5EF4-FFF2-40B4-BE49-F238E27FC236}">
+                <a16:creationId xmlns:a16="http://schemas.microsoft.com/office/drawing/2014/main" id="{05393B33-F958-8CB8-C1C7-8FA316EDB850}"/>
+              </a:ext>
+            </a:extLst>
+          </p:cNvPr>
+          <p:cNvSpPr/>
+          <p:nvPr/>
+        </p:nvSpPr>
+        <p:spPr>
+          <a:xfrm flipH="1" flipV="1">
+            <a:off x="4208826" y="1658495"/>
+            <a:ext cx="51681" cy="45719"/>
+          </a:xfrm>
+          <a:prstGeom prst="ellipse">
+            <a:avLst/>
+          </a:prstGeom>
+          <a:solidFill>
+            <a:schemeClr val="tx1"/>
+          </a:solidFill>
+          <a:ln>
+            <a:noFill/>
+          </a:ln>
+        </p:spPr>
+        <p:style>
+          <a:lnRef idx="2">
+            <a:schemeClr val="accent1">
+              <a:shade val="15000"/>
+            </a:schemeClr>
+          </a:lnRef>
+          <a:fillRef idx="1">
+            <a:schemeClr val="accent1"/>
+          </a:fillRef>
+          <a:effectRef idx="0">
+            <a:schemeClr val="accent1"/>
+          </a:effectRef>
+          <a:fontRef idx="minor">
+            <a:schemeClr val="lt1"/>
+          </a:fontRef>
+        </p:style>
+        <p:txBody>
+          <a:bodyPr rtlCol="0" anchor="ctr"/>
+          <a:lstStyle/>
+          <a:p>
+            <a:pPr algn="ctr"/>
+            <a:endParaRPr kumimoji="1" lang="ko-KR" altLang="en-US"/>
+          </a:p>
+        </p:txBody>
+      </p:sp>
+      <p:sp>
+        <p:nvSpPr>
+          <p:cNvPr id="40" name="타원 39">
+            <a:extLst>
+              <a:ext uri="{FF2B5EF4-FFF2-40B4-BE49-F238E27FC236}">
+                <a16:creationId xmlns:a16="http://schemas.microsoft.com/office/drawing/2014/main" id="{EE884B3B-7507-23DB-1FA4-F223312731C3}"/>
+              </a:ext>
+            </a:extLst>
+          </p:cNvPr>
+          <p:cNvSpPr/>
+          <p:nvPr/>
+        </p:nvSpPr>
+        <p:spPr>
+          <a:xfrm flipH="1" flipV="1">
+            <a:off x="4304656" y="1658021"/>
+            <a:ext cx="51681" cy="45719"/>
+          </a:xfrm>
+          <a:prstGeom prst="ellipse">
+            <a:avLst/>
+          </a:prstGeom>
+          <a:solidFill>
+            <a:schemeClr val="tx1"/>
+          </a:solidFill>
+          <a:ln>
+            <a:noFill/>
+          </a:ln>
+        </p:spPr>
+        <p:style>
+          <a:lnRef idx="2">
+            <a:schemeClr val="accent1">
+              <a:shade val="15000"/>
+            </a:schemeClr>
+          </a:lnRef>
+          <a:fillRef idx="1">
+            <a:schemeClr val="accent1"/>
+          </a:fillRef>
+          <a:effectRef idx="0">
+            <a:schemeClr val="accent1"/>
+          </a:effectRef>
+          <a:fontRef idx="minor">
+            <a:schemeClr val="lt1"/>
+          </a:fontRef>
+        </p:style>
+        <p:txBody>
+          <a:bodyPr rtlCol="0" anchor="ctr"/>
+          <a:lstStyle/>
+          <a:p>
+            <a:pPr algn="ctr"/>
+            <a:endParaRPr kumimoji="1" lang="ko-KR" altLang="en-US"/>
+          </a:p>
+        </p:txBody>
+      </p:sp>
+      <p:sp>
+        <p:nvSpPr>
+          <p:cNvPr id="50" name="모서리가 둥근 직사각형 49">
+            <a:extLst>
+              <a:ext uri="{FF2B5EF4-FFF2-40B4-BE49-F238E27FC236}">
+                <a16:creationId xmlns:a16="http://schemas.microsoft.com/office/drawing/2014/main" id="{6EE77615-2F40-064D-A0B8-AEE39D6E170D}"/>
+              </a:ext>
+            </a:extLst>
+          </p:cNvPr>
+          <p:cNvSpPr/>
+          <p:nvPr/>
+        </p:nvSpPr>
+        <p:spPr>
+          <a:xfrm>
+            <a:off x="3337193" y="3568273"/>
+            <a:ext cx="2425036" cy="1057517"/>
+          </a:xfrm>
+          <a:prstGeom prst="roundRect">
+            <a:avLst>
+              <a:gd name="adj" fmla="val 6920"/>
+            </a:avLst>
+          </a:prstGeom>
+          <a:solidFill>
+            <a:schemeClr val="bg1">
+              <a:lumMod val="85000"/>
+            </a:schemeClr>
+          </a:solidFill>
+          <a:ln w="12700">
+            <a:prstDash val="dash"/>
+          </a:ln>
+        </p:spPr>
+        <p:style>
+          <a:lnRef idx="2">
+            <a:schemeClr val="accent1">
+              <a:shade val="15000"/>
+            </a:schemeClr>
+          </a:lnRef>
+          <a:fillRef idx="1">
+            <a:schemeClr val="accent1"/>
+          </a:fillRef>
+          <a:effectRef idx="0">
+            <a:schemeClr val="accent1"/>
+          </a:effectRef>
+          <a:fontRef idx="minor">
+            <a:schemeClr val="lt1"/>
+          </a:fontRef>
+        </p:style>
+        <p:txBody>
+          <a:bodyPr rtlCol="0" anchor="t"/>
+          <a:lstStyle/>
+          <a:p>
+            <a:pPr algn="ctr"/>
+            <a:r>
+              <a:rPr kumimoji="1" lang="en-US" altLang="ko-KR" sz="800" b="1" u="sng">
+                <a:solidFill>
+                  <a:schemeClr val="tx1"/>
+                </a:solidFill>
+              </a:rPr>
+              <a:t>Per Request/Stream</a:t>
+            </a:r>
+            <a:r>
+              <a:rPr kumimoji="1" lang="en-US" altLang="ko-KR" sz="800">
+                <a:solidFill>
+                  <a:schemeClr val="tx1"/>
+                </a:solidFill>
+              </a:rPr>
+              <a:t> Instances</a:t>
+            </a:r>
+            <a:endParaRPr kumimoji="1" lang="ko-KR" altLang="en-US" sz="800">
+              <a:solidFill>
+                <a:schemeClr val="tx1"/>
+              </a:solidFill>
+            </a:endParaRPr>
+          </a:p>
+        </p:txBody>
+      </p:sp>
+      <p:sp>
+        <p:nvSpPr>
+          <p:cNvPr id="51" name="모서리가 둥근 직사각형 50">
+            <a:extLst>
+              <a:ext uri="{FF2B5EF4-FFF2-40B4-BE49-F238E27FC236}">
+                <a16:creationId xmlns:a16="http://schemas.microsoft.com/office/drawing/2014/main" id="{D8173D54-B0D3-7D17-4A98-C3377EA23044}"/>
+              </a:ext>
+            </a:extLst>
+          </p:cNvPr>
+          <p:cNvSpPr/>
+          <p:nvPr/>
+        </p:nvSpPr>
+        <p:spPr>
+          <a:xfrm>
+            <a:off x="3427232" y="3819187"/>
+            <a:ext cx="2199971" cy="748229"/>
+          </a:xfrm>
+          <a:prstGeom prst="roundRect">
+            <a:avLst>
+              <a:gd name="adj" fmla="val 9482"/>
+            </a:avLst>
+          </a:prstGeom>
+          <a:solidFill>
+            <a:schemeClr val="bg1"/>
+          </a:solidFill>
+          <a:ln w="12700">
+            <a:prstDash val="dash"/>
+          </a:ln>
+        </p:spPr>
+        <p:style>
+          <a:lnRef idx="2">
+            <a:schemeClr val="accent1">
+              <a:shade val="15000"/>
+            </a:schemeClr>
+          </a:lnRef>
+          <a:fillRef idx="1">
+            <a:schemeClr val="accent1"/>
+          </a:fillRef>
+          <a:effectRef idx="0">
+            <a:schemeClr val="accent1"/>
+          </a:effectRef>
+          <a:fontRef idx="minor">
+            <a:schemeClr val="lt1"/>
+          </a:fontRef>
+        </p:style>
+        <p:txBody>
+          <a:bodyPr rtlCol="0" anchor="t"/>
+          <a:lstStyle/>
+          <a:p>
+            <a:pPr algn="ctr"/>
+            <a:r>
+              <a:rPr kumimoji="1" lang="en-US" altLang="ko-KR" sz="800">
+                <a:solidFill>
+                  <a:schemeClr val="tx1"/>
+                </a:solidFill>
+              </a:rPr>
+              <a:t>Downstream HTTP Filters</a:t>
+            </a:r>
+            <a:endParaRPr kumimoji="1" lang="ko-KR" altLang="en-US" sz="800">
+              <a:solidFill>
+                <a:schemeClr val="tx1"/>
+              </a:solidFill>
+            </a:endParaRPr>
+          </a:p>
+        </p:txBody>
+      </p:sp>
+      <p:sp>
+        <p:nvSpPr>
+          <p:cNvPr id="52" name="모서리가 둥근 직사각형 51">
+            <a:extLst>
+              <a:ext uri="{FF2B5EF4-FFF2-40B4-BE49-F238E27FC236}">
+                <a16:creationId xmlns:a16="http://schemas.microsoft.com/office/drawing/2014/main" id="{61A2502D-523F-50A2-7C86-E4C79D988D3C}"/>
+              </a:ext>
+            </a:extLst>
+          </p:cNvPr>
+          <p:cNvSpPr/>
+          <p:nvPr/>
+        </p:nvSpPr>
+        <p:spPr>
+          <a:xfrm>
+            <a:off x="5518339" y="4082823"/>
+            <a:ext cx="801642" cy="306783"/>
+          </a:xfrm>
+          <a:prstGeom prst="roundRect">
+            <a:avLst>
+              <a:gd name="adj" fmla="val 19601"/>
+            </a:avLst>
+          </a:prstGeom>
+          <a:solidFill>
+            <a:schemeClr val="bg1"/>
+          </a:solidFill>
+          <a:ln w="12700"/>
+        </p:spPr>
+        <p:style>
+          <a:lnRef idx="2">
+            <a:schemeClr val="accent1">
+              <a:shade val="15000"/>
+            </a:schemeClr>
+          </a:lnRef>
+          <a:fillRef idx="1">
+            <a:schemeClr val="accent1"/>
+          </a:fillRef>
+          <a:effectRef idx="0">
+            <a:schemeClr val="accent1"/>
+          </a:effectRef>
+          <a:fontRef idx="minor">
+            <a:schemeClr val="lt1"/>
+          </a:fontRef>
+        </p:style>
+        <p:txBody>
+          <a:bodyPr rtlCol="0" anchor="ctr"/>
+          <a:lstStyle/>
+          <a:p>
+            <a:pPr algn="ctr"/>
+            <a:r>
+              <a:rPr kumimoji="1" lang="en-US" altLang="ko-KR" sz="800">
+                <a:solidFill>
+                  <a:schemeClr val="tx1"/>
+                </a:solidFill>
+              </a:rPr>
+              <a:t>Router</a:t>
+            </a:r>
+            <a:endParaRPr kumimoji="1" lang="ko-KR" altLang="en-US" sz="800">
+              <a:solidFill>
+                <a:schemeClr val="tx1"/>
+              </a:solidFill>
+            </a:endParaRPr>
+          </a:p>
+        </p:txBody>
+      </p:sp>
+      <p:sp>
+        <p:nvSpPr>
+          <p:cNvPr id="53" name="타원 52">
+            <a:extLst>
+              <a:ext uri="{FF2B5EF4-FFF2-40B4-BE49-F238E27FC236}">
+                <a16:creationId xmlns:a16="http://schemas.microsoft.com/office/drawing/2014/main" id="{EE4BF15A-D518-B083-186A-325E8E5041BF}"/>
+              </a:ext>
+            </a:extLst>
+          </p:cNvPr>
+          <p:cNvSpPr/>
+          <p:nvPr/>
+        </p:nvSpPr>
+        <p:spPr>
+          <a:xfrm flipH="1" flipV="1">
+            <a:off x="4112634" y="2643759"/>
+            <a:ext cx="51681" cy="45719"/>
+          </a:xfrm>
+          <a:prstGeom prst="ellipse">
+            <a:avLst/>
+          </a:prstGeom>
+          <a:solidFill>
+            <a:schemeClr val="tx1"/>
+          </a:solidFill>
+          <a:ln>
+            <a:noFill/>
+          </a:ln>
+        </p:spPr>
+        <p:style>
+          <a:lnRef idx="2">
+            <a:schemeClr val="accent1">
+              <a:shade val="15000"/>
+            </a:schemeClr>
+          </a:lnRef>
+          <a:fillRef idx="1">
+            <a:schemeClr val="accent1"/>
+          </a:fillRef>
+          <a:effectRef idx="0">
+            <a:schemeClr val="accent1"/>
+          </a:effectRef>
+          <a:fontRef idx="minor">
+            <a:schemeClr val="lt1"/>
+          </a:fontRef>
+        </p:style>
+        <p:txBody>
+          <a:bodyPr rtlCol="0" anchor="ctr"/>
+          <a:lstStyle/>
+          <a:p>
+            <a:pPr algn="ctr"/>
+            <a:endParaRPr kumimoji="1" lang="ko-KR" altLang="en-US"/>
+          </a:p>
+        </p:txBody>
+      </p:sp>
+      <p:sp>
+        <p:nvSpPr>
+          <p:cNvPr id="54" name="타원 53">
+            <a:extLst>
+              <a:ext uri="{FF2B5EF4-FFF2-40B4-BE49-F238E27FC236}">
+                <a16:creationId xmlns:a16="http://schemas.microsoft.com/office/drawing/2014/main" id="{AB6BF4EE-62DA-CC3E-41F2-87AF2E0E9B0A}"/>
+              </a:ext>
+            </a:extLst>
+          </p:cNvPr>
+          <p:cNvSpPr/>
+          <p:nvPr/>
+        </p:nvSpPr>
+        <p:spPr>
+          <a:xfrm flipH="1" flipV="1">
+            <a:off x="4208465" y="2644232"/>
+            <a:ext cx="51681" cy="45719"/>
+          </a:xfrm>
+          <a:prstGeom prst="ellipse">
+            <a:avLst/>
+          </a:prstGeom>
+          <a:solidFill>
+            <a:schemeClr val="tx1"/>
+          </a:solidFill>
+          <a:ln>
+            <a:noFill/>
+          </a:ln>
+        </p:spPr>
+        <p:style>
+          <a:lnRef idx="2">
+            <a:schemeClr val="accent1">
+              <a:shade val="15000"/>
+            </a:schemeClr>
+          </a:lnRef>
+          <a:fillRef idx="1">
+            <a:schemeClr val="accent1"/>
+          </a:fillRef>
+          <a:effectRef idx="0">
+            <a:schemeClr val="accent1"/>
+          </a:effectRef>
+          <a:fontRef idx="minor">
+            <a:schemeClr val="lt1"/>
+          </a:fontRef>
+        </p:style>
+        <p:txBody>
+          <a:bodyPr rtlCol="0" anchor="ctr"/>
+          <a:lstStyle/>
+          <a:p>
+            <a:pPr algn="ctr"/>
+            <a:endParaRPr kumimoji="1" lang="ko-KR" altLang="en-US"/>
+          </a:p>
+        </p:txBody>
+      </p:sp>
+      <p:sp>
+        <p:nvSpPr>
+          <p:cNvPr id="55" name="타원 54">
+            <a:extLst>
+              <a:ext uri="{FF2B5EF4-FFF2-40B4-BE49-F238E27FC236}">
+                <a16:creationId xmlns:a16="http://schemas.microsoft.com/office/drawing/2014/main" id="{53083B53-01D3-5A1B-5602-F74D6B603FF7}"/>
+              </a:ext>
+            </a:extLst>
+          </p:cNvPr>
+          <p:cNvSpPr/>
+          <p:nvPr/>
+        </p:nvSpPr>
+        <p:spPr>
+          <a:xfrm flipH="1" flipV="1">
+            <a:off x="4304295" y="2643758"/>
+            <a:ext cx="51681" cy="45719"/>
+          </a:xfrm>
+          <a:prstGeom prst="ellipse">
+            <a:avLst/>
+          </a:prstGeom>
+          <a:solidFill>
+            <a:schemeClr val="tx1"/>
+          </a:solidFill>
+          <a:ln>
+            <a:noFill/>
+          </a:ln>
+        </p:spPr>
+        <p:style>
+          <a:lnRef idx="2">
+            <a:schemeClr val="accent1">
+              <a:shade val="15000"/>
+            </a:schemeClr>
+          </a:lnRef>
+          <a:fillRef idx="1">
+            <a:schemeClr val="accent1"/>
+          </a:fillRef>
+          <a:effectRef idx="0">
+            <a:schemeClr val="accent1"/>
+          </a:effectRef>
+          <a:fontRef idx="minor">
+            <a:schemeClr val="lt1"/>
+          </a:fontRef>
+        </p:style>
+        <p:txBody>
+          <a:bodyPr rtlCol="0" anchor="ctr"/>
+          <a:lstStyle/>
+          <a:p>
+            <a:pPr algn="ctr"/>
+            <a:endParaRPr kumimoji="1" lang="ko-KR" altLang="en-US"/>
+          </a:p>
+        </p:txBody>
+      </p:sp>
+      <p:sp>
+        <p:nvSpPr>
+          <p:cNvPr id="56" name="모서리가 둥근 직사각형 55">
+            <a:extLst>
+              <a:ext uri="{FF2B5EF4-FFF2-40B4-BE49-F238E27FC236}">
+                <a16:creationId xmlns:a16="http://schemas.microsoft.com/office/drawing/2014/main" id="{5585589C-A876-CB3E-B1AB-320495FDB560}"/>
+              </a:ext>
+            </a:extLst>
+          </p:cNvPr>
+          <p:cNvSpPr/>
+          <p:nvPr/>
+        </p:nvSpPr>
+        <p:spPr>
+          <a:xfrm>
+            <a:off x="7548168" y="311006"/>
+            <a:ext cx="1052864" cy="427640"/>
+          </a:xfrm>
+          <a:prstGeom prst="roundRect">
+            <a:avLst>
+              <a:gd name="adj" fmla="val 12191"/>
+            </a:avLst>
+          </a:prstGeom>
+          <a:solidFill>
+            <a:schemeClr val="bg1"/>
+          </a:solidFill>
+          <a:ln w="12700"/>
+        </p:spPr>
+        <p:style>
+          <a:lnRef idx="2">
+            <a:schemeClr val="accent1">
+              <a:shade val="15000"/>
+            </a:schemeClr>
+          </a:lnRef>
+          <a:fillRef idx="1">
+            <a:schemeClr val="accent1"/>
+          </a:fillRef>
+          <a:effectRef idx="0">
+            <a:schemeClr val="accent1"/>
+          </a:effectRef>
+          <a:fontRef idx="minor">
+            <a:schemeClr val="lt1"/>
+          </a:fontRef>
+        </p:style>
+        <p:txBody>
+          <a:bodyPr rtlCol="0" anchor="ctr"/>
+          <a:lstStyle/>
+          <a:p>
+            <a:pPr algn="ctr"/>
+            <a:r>
+              <a:rPr kumimoji="1" lang="en-US" altLang="ko-KR" sz="800">
+                <a:solidFill>
+                  <a:schemeClr val="tx1"/>
+                </a:solidFill>
+              </a:rPr>
+              <a:t>Downstream (TLS)</a:t>
+            </a:r>
+          </a:p>
+          <a:p>
+            <a:pPr algn="ctr"/>
+            <a:r>
+              <a:rPr kumimoji="1" lang="en-US" altLang="ko-KR" sz="800">
+                <a:solidFill>
+                  <a:schemeClr val="tx1"/>
+                </a:solidFill>
+              </a:rPr>
+              <a:t>Transport Socket</a:t>
+            </a:r>
+            <a:endParaRPr kumimoji="1" lang="ko-KR" altLang="en-US" sz="800">
+              <a:solidFill>
+                <a:schemeClr val="tx1"/>
+              </a:solidFill>
+            </a:endParaRPr>
+          </a:p>
+        </p:txBody>
+      </p:sp>
+      <p:sp>
+        <p:nvSpPr>
+          <p:cNvPr id="9" name="모서리가 둥근 직사각형 8">
+            <a:extLst>
+              <a:ext uri="{FF2B5EF4-FFF2-40B4-BE49-F238E27FC236}">
+                <a16:creationId xmlns:a16="http://schemas.microsoft.com/office/drawing/2014/main" id="{93C04865-7782-97C8-4FEC-8B0230A80A7F}"/>
+              </a:ext>
+            </a:extLst>
+          </p:cNvPr>
+          <p:cNvSpPr/>
+          <p:nvPr/>
+        </p:nvSpPr>
+        <p:spPr>
+          <a:xfrm>
+            <a:off x="3522738" y="4081583"/>
+            <a:ext cx="801642" cy="306783"/>
+          </a:xfrm>
+          <a:prstGeom prst="roundRect">
+            <a:avLst>
+              <a:gd name="adj" fmla="val 19601"/>
+            </a:avLst>
+          </a:prstGeom>
+          <a:solidFill>
+            <a:schemeClr val="bg1"/>
+          </a:solidFill>
+          <a:ln w="12700"/>
+        </p:spPr>
+        <p:style>
+          <a:lnRef idx="2">
+            <a:schemeClr val="accent1">
+              <a:shade val="15000"/>
+            </a:schemeClr>
+          </a:lnRef>
+          <a:fillRef idx="1">
+            <a:schemeClr val="accent1"/>
+          </a:fillRef>
+          <a:effectRef idx="0">
+            <a:schemeClr val="accent1"/>
+          </a:effectRef>
+          <a:fontRef idx="minor">
+            <a:schemeClr val="lt1"/>
+          </a:fontRef>
+        </p:style>
+        <p:txBody>
+          <a:bodyPr rtlCol="0" anchor="ctr"/>
+          <a:lstStyle/>
+          <a:p>
+            <a:pPr algn="ctr"/>
+            <a:r>
+              <a:rPr kumimoji="1" lang="en-US" altLang="ko-KR" sz="800">
+                <a:solidFill>
+                  <a:schemeClr val="tx1"/>
+                </a:solidFill>
+              </a:rPr>
+              <a:t>CORS</a:t>
+            </a:r>
+            <a:endParaRPr kumimoji="1" lang="ko-KR" altLang="en-US" sz="800">
+              <a:solidFill>
+                <a:schemeClr val="tx1"/>
+              </a:solidFill>
+            </a:endParaRPr>
+          </a:p>
+        </p:txBody>
+      </p:sp>
+      <p:cxnSp>
+        <p:nvCxnSpPr>
+          <p:cNvPr id="10" name="직선 화살표 연결선 9">
+            <a:extLst>
+              <a:ext uri="{FF2B5EF4-FFF2-40B4-BE49-F238E27FC236}">
+                <a16:creationId xmlns:a16="http://schemas.microsoft.com/office/drawing/2014/main" id="{C33EFF58-4EB8-1C29-B34D-6A61F800C9A4}"/>
+              </a:ext>
+            </a:extLst>
+          </p:cNvPr>
+          <p:cNvCxnSpPr>
+            <a:cxnSpLocks/>
+            <a:stCxn id="44" idx="3"/>
+            <a:endCxn id="43" idx="1"/>
+          </p:cNvCxnSpPr>
+          <p:nvPr/>
+        </p:nvCxnSpPr>
+        <p:spPr>
+          <a:xfrm>
+            <a:off x="4052907" y="2660576"/>
+            <a:ext cx="886990" cy="1"/>
+          </a:xfrm>
+          <a:prstGeom prst="straightConnector1">
+            <a:avLst/>
+          </a:prstGeom>
+          <a:ln w="12700">
+            <a:solidFill>
+              <a:schemeClr val="accent3"/>
+            </a:solidFill>
+            <a:tailEnd type="triangle"/>
+          </a:ln>
+        </p:spPr>
+        <p:style>
+          <a:lnRef idx="1">
+            <a:schemeClr val="accent1"/>
+          </a:lnRef>
+          <a:fillRef idx="0">
+            <a:schemeClr val="accent1"/>
+          </a:fillRef>
+          <a:effectRef idx="0">
+            <a:schemeClr val="accent1"/>
+          </a:effectRef>
+          <a:fontRef idx="minor">
+            <a:schemeClr val="tx1"/>
+          </a:fontRef>
+        </p:style>
+      </p:cxnSp>
+      <p:cxnSp>
+        <p:nvCxnSpPr>
+          <p:cNvPr id="13" name="직선 화살표 연결선 12">
+            <a:extLst>
+              <a:ext uri="{FF2B5EF4-FFF2-40B4-BE49-F238E27FC236}">
+                <a16:creationId xmlns:a16="http://schemas.microsoft.com/office/drawing/2014/main" id="{CAB03C2B-867B-FD86-01EF-21C1BE2D39BD}"/>
+              </a:ext>
+            </a:extLst>
+          </p:cNvPr>
+          <p:cNvCxnSpPr>
+            <a:cxnSpLocks/>
+            <a:stCxn id="43" idx="3"/>
+            <a:endCxn id="45" idx="1"/>
+          </p:cNvCxnSpPr>
+          <p:nvPr/>
+        </p:nvCxnSpPr>
+        <p:spPr>
+          <a:xfrm flipV="1">
+            <a:off x="5741539" y="2660575"/>
+            <a:ext cx="179651" cy="2"/>
+          </a:xfrm>
+          <a:prstGeom prst="straightConnector1">
+            <a:avLst/>
+          </a:prstGeom>
+          <a:ln w="12700">
+            <a:solidFill>
+              <a:schemeClr val="accent3"/>
+            </a:solidFill>
+            <a:tailEnd type="triangle"/>
+          </a:ln>
+        </p:spPr>
+        <p:style>
+          <a:lnRef idx="1">
+            <a:schemeClr val="accent1"/>
+          </a:lnRef>
+          <a:fillRef idx="0">
+            <a:schemeClr val="accent1"/>
+          </a:fillRef>
+          <a:effectRef idx="0">
+            <a:schemeClr val="accent1"/>
+          </a:effectRef>
+          <a:fontRef idx="minor">
+            <a:schemeClr val="tx1"/>
+          </a:fontRef>
+        </p:style>
+      </p:cxnSp>
+      <p:sp>
+        <p:nvSpPr>
+          <p:cNvPr id="17" name="모서리가 둥근 직사각형 16">
+            <a:extLst>
+              <a:ext uri="{FF2B5EF4-FFF2-40B4-BE49-F238E27FC236}">
+                <a16:creationId xmlns:a16="http://schemas.microsoft.com/office/drawing/2014/main" id="{780D78E6-DAA9-5196-3B69-54E76D48F369}"/>
+              </a:ext>
+            </a:extLst>
+          </p:cNvPr>
+          <p:cNvSpPr/>
+          <p:nvPr/>
+        </p:nvSpPr>
+        <p:spPr>
+          <a:xfrm>
+            <a:off x="4562892" y="4081582"/>
+            <a:ext cx="801642" cy="306783"/>
+          </a:xfrm>
+          <a:prstGeom prst="roundRect">
+            <a:avLst>
+              <a:gd name="adj" fmla="val 19601"/>
+            </a:avLst>
+          </a:prstGeom>
+          <a:solidFill>
+            <a:schemeClr val="bg1"/>
+          </a:solidFill>
+          <a:ln w="12700"/>
+        </p:spPr>
+        <p:style>
+          <a:lnRef idx="2">
+            <a:schemeClr val="accent1">
+              <a:shade val="15000"/>
+            </a:schemeClr>
+          </a:lnRef>
+          <a:fillRef idx="1">
+            <a:schemeClr val="accent1"/>
+          </a:fillRef>
+          <a:effectRef idx="0">
+            <a:schemeClr val="accent1"/>
+          </a:effectRef>
+          <a:fontRef idx="minor">
+            <a:schemeClr val="lt1"/>
+          </a:fontRef>
+        </p:style>
+        <p:txBody>
+          <a:bodyPr rtlCol="0" anchor="ctr"/>
+          <a:lstStyle/>
+          <a:p>
+            <a:pPr algn="ctr"/>
+            <a:r>
+              <a:rPr kumimoji="1" lang="en-US" altLang="ko-KR" sz="800">
+                <a:solidFill>
+                  <a:schemeClr val="tx1"/>
+                </a:solidFill>
+              </a:rPr>
+              <a:t>RBAC (L7)</a:t>
+            </a:r>
+            <a:endParaRPr kumimoji="1" lang="ko-KR" altLang="en-US" sz="800">
+              <a:solidFill>
+                <a:schemeClr val="tx1"/>
+              </a:solidFill>
+            </a:endParaRPr>
+          </a:p>
+        </p:txBody>
+      </p:sp>
+    </p:spTree>
+    <p:extLst>
+      <p:ext uri="{BB962C8B-B14F-4D97-AF65-F5344CB8AC3E}">
+        <p14:creationId xmlns:p14="http://schemas.microsoft.com/office/powerpoint/2010/main" val="2855718301"/>
+      </p:ext>
+    </p:extLst>
+  </p:cSld>
+  <p:clrMapOvr>
+    <a:masterClrMapping/>
+  </p:clrMapOvr>
+</p:sld>
+</file>
+
+<file path=ppt/slides/slide2.xml><?xml version="1.0" encoding="utf-8"?>
+<p:sld xmlns:a="http://schemas.openxmlformats.org/drawingml/2006/main" xmlns:r="http://schemas.openxmlformats.org/officeDocument/2006/relationships" xmlns:p="http://schemas.openxmlformats.org/presentationml/2006/main">
+  <p:cSld>
+    <p:spTree>
+      <p:nvGrpSpPr>
+        <p:cNvPr id="1" name="">
+          <a:extLst>
+            <a:ext uri="{FF2B5EF4-FFF2-40B4-BE49-F238E27FC236}">
               <a16:creationId xmlns:a16="http://schemas.microsoft.com/office/drawing/2014/main" id="{C13601D5-3126-6C9C-D915-7616C099A8E5}"/>
             </a:ext>
           </a:extLst>
@@ -3397,6 +5512,1868 @@
           <a:chExt cx="0" cy="0"/>
         </a:xfrm>
       </p:grpSpPr>
+      <p:sp>
+        <p:nvSpPr>
+          <p:cNvPr id="2" name="모서리가 둥근 직사각형 1">
+            <a:extLst>
+              <a:ext uri="{FF2B5EF4-FFF2-40B4-BE49-F238E27FC236}">
+                <a16:creationId xmlns:a16="http://schemas.microsoft.com/office/drawing/2014/main" id="{342DF4B5-1C62-E220-DA7B-4FFAFFAB051A}"/>
+              </a:ext>
+            </a:extLst>
+          </p:cNvPr>
+          <p:cNvSpPr/>
+          <p:nvPr/>
+        </p:nvSpPr>
+        <p:spPr>
+          <a:xfrm>
+            <a:off x="107505" y="3170974"/>
+            <a:ext cx="970252" cy="427639"/>
+          </a:xfrm>
+          <a:prstGeom prst="roundRect">
+            <a:avLst>
+              <a:gd name="adj" fmla="val 12191"/>
+            </a:avLst>
+          </a:prstGeom>
+          <a:noFill/>
+          <a:ln w="12700"/>
+        </p:spPr>
+        <p:style>
+          <a:lnRef idx="2">
+            <a:schemeClr val="accent1">
+              <a:shade val="15000"/>
+            </a:schemeClr>
+          </a:lnRef>
+          <a:fillRef idx="1">
+            <a:schemeClr val="accent1"/>
+          </a:fillRef>
+          <a:effectRef idx="0">
+            <a:schemeClr val="accent1"/>
+          </a:effectRef>
+          <a:fontRef idx="minor">
+            <a:schemeClr val="lt1"/>
+          </a:fontRef>
+        </p:style>
+        <p:txBody>
+          <a:bodyPr rtlCol="0" anchor="ctr"/>
+          <a:lstStyle/>
+          <a:p>
+            <a:pPr algn="ctr"/>
+            <a:r>
+              <a:rPr kumimoji="1" lang="en-US" altLang="ko-KR" sz="800">
+                <a:solidFill>
+                  <a:schemeClr val="tx1"/>
+                </a:solidFill>
+              </a:rPr>
+              <a:t>Downstream</a:t>
+            </a:r>
+          </a:p>
+          <a:p>
+            <a:pPr algn="ctr"/>
+            <a:r>
+              <a:rPr kumimoji="1" lang="en-US" altLang="ko-KR" sz="800">
+                <a:solidFill>
+                  <a:schemeClr val="tx1"/>
+                </a:solidFill>
+              </a:rPr>
+              <a:t>(Client)</a:t>
+            </a:r>
+            <a:endParaRPr kumimoji="1" lang="ko-KR" altLang="en-US" sz="800">
+              <a:solidFill>
+                <a:schemeClr val="tx1"/>
+              </a:solidFill>
+            </a:endParaRPr>
+          </a:p>
+        </p:txBody>
+      </p:sp>
+      <p:sp>
+        <p:nvSpPr>
+          <p:cNvPr id="4" name="모서리가 둥근 직사각형 3">
+            <a:extLst>
+              <a:ext uri="{FF2B5EF4-FFF2-40B4-BE49-F238E27FC236}">
+                <a16:creationId xmlns:a16="http://schemas.microsoft.com/office/drawing/2014/main" id="{50531C4D-C6BE-C2A6-6677-B9FF9494911C}"/>
+              </a:ext>
+            </a:extLst>
+          </p:cNvPr>
+          <p:cNvSpPr/>
+          <p:nvPr/>
+        </p:nvSpPr>
+        <p:spPr>
+          <a:xfrm>
+            <a:off x="1475656" y="881974"/>
+            <a:ext cx="6120680" cy="3443592"/>
+          </a:xfrm>
+          <a:prstGeom prst="roundRect">
+            <a:avLst>
+              <a:gd name="adj" fmla="val 5395"/>
+            </a:avLst>
+          </a:prstGeom>
+          <a:solidFill>
+            <a:schemeClr val="bg1"/>
+          </a:solidFill>
+          <a:ln w="12700"/>
+        </p:spPr>
+        <p:style>
+          <a:lnRef idx="2">
+            <a:schemeClr val="accent1">
+              <a:shade val="15000"/>
+            </a:schemeClr>
+          </a:lnRef>
+          <a:fillRef idx="1">
+            <a:schemeClr val="accent1"/>
+          </a:fillRef>
+          <a:effectRef idx="0">
+            <a:schemeClr val="accent1"/>
+          </a:effectRef>
+          <a:fontRef idx="minor">
+            <a:schemeClr val="lt1"/>
+          </a:fontRef>
+        </p:style>
+        <p:txBody>
+          <a:bodyPr rtlCol="0" anchor="b"/>
+          <a:lstStyle/>
+          <a:p>
+            <a:r>
+              <a:rPr kumimoji="1" lang="en-US" altLang="ko-KR" sz="900" b="1">
+                <a:solidFill>
+                  <a:schemeClr val="tx1"/>
+                </a:solidFill>
+              </a:rPr>
+              <a:t>Worker Thread</a:t>
+            </a:r>
+            <a:endParaRPr kumimoji="1" lang="ko-KR" altLang="en-US" sz="900" b="1">
+              <a:solidFill>
+                <a:schemeClr val="tx1"/>
+              </a:solidFill>
+            </a:endParaRPr>
+          </a:p>
+        </p:txBody>
+      </p:sp>
+      <p:sp>
+        <p:nvSpPr>
+          <p:cNvPr id="5" name="모서리가 둥근 직사각형 4">
+            <a:extLst>
+              <a:ext uri="{FF2B5EF4-FFF2-40B4-BE49-F238E27FC236}">
+                <a16:creationId xmlns:a16="http://schemas.microsoft.com/office/drawing/2014/main" id="{68A821A7-3DB9-6F85-3714-2664FE6A664D}"/>
+              </a:ext>
+            </a:extLst>
+          </p:cNvPr>
+          <p:cNvSpPr/>
+          <p:nvPr/>
+        </p:nvSpPr>
+        <p:spPr>
+          <a:xfrm>
+            <a:off x="1619673" y="2491838"/>
+            <a:ext cx="1052864" cy="306783"/>
+          </a:xfrm>
+          <a:prstGeom prst="roundRect">
+            <a:avLst>
+              <a:gd name="adj" fmla="val 12191"/>
+            </a:avLst>
+          </a:prstGeom>
+          <a:noFill/>
+          <a:ln w="12700"/>
+        </p:spPr>
+        <p:style>
+          <a:lnRef idx="2">
+            <a:schemeClr val="accent1">
+              <a:shade val="15000"/>
+            </a:schemeClr>
+          </a:lnRef>
+          <a:fillRef idx="1">
+            <a:schemeClr val="accent1"/>
+          </a:fillRef>
+          <a:effectRef idx="0">
+            <a:schemeClr val="accent1"/>
+          </a:effectRef>
+          <a:fontRef idx="minor">
+            <a:schemeClr val="lt1"/>
+          </a:fontRef>
+        </p:style>
+        <p:txBody>
+          <a:bodyPr rtlCol="0" anchor="ctr"/>
+          <a:lstStyle/>
+          <a:p>
+            <a:pPr algn="ctr"/>
+            <a:r>
+              <a:rPr kumimoji="1" lang="en-US" altLang="ko-KR" sz="800">
+                <a:solidFill>
+                  <a:schemeClr val="tx1"/>
+                </a:solidFill>
+              </a:rPr>
+              <a:t>Listener</a:t>
+            </a:r>
+          </a:p>
+          <a:p>
+            <a:pPr algn="ctr"/>
+            <a:r>
+              <a:rPr kumimoji="1" lang="en-US" altLang="ko-KR" sz="800">
+                <a:solidFill>
+                  <a:schemeClr val="tx1"/>
+                </a:solidFill>
+              </a:rPr>
+              <a:t>(accept())</a:t>
+            </a:r>
+            <a:endParaRPr kumimoji="1" lang="ko-KR" altLang="en-US" sz="800">
+              <a:solidFill>
+                <a:schemeClr val="tx1"/>
+              </a:solidFill>
+            </a:endParaRPr>
+          </a:p>
+        </p:txBody>
+      </p:sp>
+      <p:sp>
+        <p:nvSpPr>
+          <p:cNvPr id="6" name="모서리가 둥근 직사각형 5">
+            <a:extLst>
+              <a:ext uri="{FF2B5EF4-FFF2-40B4-BE49-F238E27FC236}">
+                <a16:creationId xmlns:a16="http://schemas.microsoft.com/office/drawing/2014/main" id="{038DADD2-B698-1DB7-6BD4-06458FC16DBC}"/>
+              </a:ext>
+            </a:extLst>
+          </p:cNvPr>
+          <p:cNvSpPr/>
+          <p:nvPr/>
+        </p:nvSpPr>
+        <p:spPr>
+          <a:xfrm>
+            <a:off x="1619673" y="3169508"/>
+            <a:ext cx="1052864" cy="427640"/>
+          </a:xfrm>
+          <a:prstGeom prst="roundRect">
+            <a:avLst>
+              <a:gd name="adj" fmla="val 14972"/>
+            </a:avLst>
+          </a:prstGeom>
+          <a:solidFill>
+            <a:schemeClr val="bg1">
+              <a:lumMod val="95000"/>
+            </a:schemeClr>
+          </a:solidFill>
+          <a:ln w="12700"/>
+        </p:spPr>
+        <p:style>
+          <a:lnRef idx="2">
+            <a:schemeClr val="accent1">
+              <a:shade val="15000"/>
+            </a:schemeClr>
+          </a:lnRef>
+          <a:fillRef idx="1">
+            <a:schemeClr val="accent1"/>
+          </a:fillRef>
+          <a:effectRef idx="0">
+            <a:schemeClr val="accent1"/>
+          </a:effectRef>
+          <a:fontRef idx="minor">
+            <a:schemeClr val="lt1"/>
+          </a:fontRef>
+        </p:style>
+        <p:txBody>
+          <a:bodyPr rtlCol="0" anchor="ctr"/>
+          <a:lstStyle/>
+          <a:p>
+            <a:pPr algn="ctr"/>
+            <a:r>
+              <a:rPr kumimoji="1" lang="en-US" altLang="ko-KR" sz="800" b="1">
+                <a:solidFill>
+                  <a:schemeClr val="tx1"/>
+                </a:solidFill>
+              </a:rPr>
+              <a:t>Dispatcher</a:t>
+            </a:r>
+          </a:p>
+        </p:txBody>
+      </p:sp>
+      <p:cxnSp>
+        <p:nvCxnSpPr>
+          <p:cNvPr id="8" name="직선 화살표 연결선 7">
+            <a:extLst>
+              <a:ext uri="{FF2B5EF4-FFF2-40B4-BE49-F238E27FC236}">
+                <a16:creationId xmlns:a16="http://schemas.microsoft.com/office/drawing/2014/main" id="{207B9CD0-F7E6-3E07-7214-264000812231}"/>
+              </a:ext>
+            </a:extLst>
+          </p:cNvPr>
+          <p:cNvCxnSpPr>
+            <a:cxnSpLocks/>
+          </p:cNvCxnSpPr>
+          <p:nvPr/>
+        </p:nvCxnSpPr>
+        <p:spPr>
+          <a:xfrm>
+            <a:off x="1077757" y="3219822"/>
+            <a:ext cx="541916" cy="0"/>
+          </a:xfrm>
+          <a:prstGeom prst="straightConnector1">
+            <a:avLst/>
+          </a:prstGeom>
+          <a:ln w="12700">
+            <a:solidFill>
+              <a:schemeClr val="accent1"/>
+            </a:solidFill>
+            <a:tailEnd type="triangle"/>
+          </a:ln>
+        </p:spPr>
+        <p:style>
+          <a:lnRef idx="1">
+            <a:schemeClr val="accent1"/>
+          </a:lnRef>
+          <a:fillRef idx="0">
+            <a:schemeClr val="accent1"/>
+          </a:fillRef>
+          <a:effectRef idx="0">
+            <a:schemeClr val="accent1"/>
+          </a:effectRef>
+          <a:fontRef idx="minor">
+            <a:schemeClr val="tx1"/>
+          </a:fontRef>
+        </p:style>
+      </p:cxnSp>
+      <p:cxnSp>
+        <p:nvCxnSpPr>
+          <p:cNvPr id="16" name="직선 화살표 연결선 15">
+            <a:extLst>
+              <a:ext uri="{FF2B5EF4-FFF2-40B4-BE49-F238E27FC236}">
+                <a16:creationId xmlns:a16="http://schemas.microsoft.com/office/drawing/2014/main" id="{7FCB9AF7-A330-402F-9105-CBC88F419A76}"/>
+              </a:ext>
+            </a:extLst>
+          </p:cNvPr>
+          <p:cNvCxnSpPr>
+            <a:cxnSpLocks/>
+          </p:cNvCxnSpPr>
+          <p:nvPr/>
+        </p:nvCxnSpPr>
+        <p:spPr>
+          <a:xfrm flipV="1">
+            <a:off x="2074097" y="2798621"/>
+            <a:ext cx="0" cy="370887"/>
+          </a:xfrm>
+          <a:prstGeom prst="straightConnector1">
+            <a:avLst/>
+          </a:prstGeom>
+          <a:ln w="12700">
+            <a:solidFill>
+              <a:schemeClr val="accent1"/>
+            </a:solidFill>
+            <a:tailEnd type="triangle"/>
+          </a:ln>
+        </p:spPr>
+        <p:style>
+          <a:lnRef idx="1">
+            <a:schemeClr val="accent1"/>
+          </a:lnRef>
+          <a:fillRef idx="0">
+            <a:schemeClr val="accent1"/>
+          </a:fillRef>
+          <a:effectRef idx="0">
+            <a:schemeClr val="accent1"/>
+          </a:effectRef>
+          <a:fontRef idx="minor">
+            <a:schemeClr val="tx1"/>
+          </a:fontRef>
+        </p:style>
+      </p:cxnSp>
+      <p:cxnSp>
+        <p:nvCxnSpPr>
+          <p:cNvPr id="23" name="직선 화살표 연결선 22">
+            <a:extLst>
+              <a:ext uri="{FF2B5EF4-FFF2-40B4-BE49-F238E27FC236}">
+                <a16:creationId xmlns:a16="http://schemas.microsoft.com/office/drawing/2014/main" id="{D0614E0A-E63B-2720-6210-0BB93A1EE736}"/>
+              </a:ext>
+            </a:extLst>
+          </p:cNvPr>
+          <p:cNvCxnSpPr>
+            <a:cxnSpLocks/>
+          </p:cNvCxnSpPr>
+          <p:nvPr/>
+        </p:nvCxnSpPr>
+        <p:spPr>
+          <a:xfrm flipH="1">
+            <a:off x="1077757" y="3311320"/>
+            <a:ext cx="541916" cy="1466"/>
+          </a:xfrm>
+          <a:prstGeom prst="straightConnector1">
+            <a:avLst/>
+          </a:prstGeom>
+          <a:ln w="12700">
+            <a:solidFill>
+              <a:schemeClr val="accent1"/>
+            </a:solidFill>
+            <a:tailEnd type="triangle"/>
+          </a:ln>
+        </p:spPr>
+        <p:style>
+          <a:lnRef idx="1">
+            <a:schemeClr val="accent1"/>
+          </a:lnRef>
+          <a:fillRef idx="0">
+            <a:schemeClr val="accent1"/>
+          </a:fillRef>
+          <a:effectRef idx="0">
+            <a:schemeClr val="accent1"/>
+          </a:effectRef>
+          <a:fontRef idx="minor">
+            <a:schemeClr val="tx1"/>
+          </a:fontRef>
+        </p:style>
+      </p:cxnSp>
+      <p:sp>
+        <p:nvSpPr>
+          <p:cNvPr id="30" name="모서리가 둥근 직사각형 29">
+            <a:extLst>
+              <a:ext uri="{FF2B5EF4-FFF2-40B4-BE49-F238E27FC236}">
+                <a16:creationId xmlns:a16="http://schemas.microsoft.com/office/drawing/2014/main" id="{7FF793BE-E2AC-BFAA-25FB-A7D0B378838C}"/>
+              </a:ext>
+            </a:extLst>
+          </p:cNvPr>
+          <p:cNvSpPr/>
+          <p:nvPr/>
+        </p:nvSpPr>
+        <p:spPr>
+          <a:xfrm>
+            <a:off x="7668344" y="1131590"/>
+            <a:ext cx="1052864" cy="306783"/>
+          </a:xfrm>
+          <a:prstGeom prst="roundRect">
+            <a:avLst>
+              <a:gd name="adj" fmla="val 12191"/>
+            </a:avLst>
+          </a:prstGeom>
+          <a:noFill/>
+          <a:ln w="12700"/>
+        </p:spPr>
+        <p:style>
+          <a:lnRef idx="2">
+            <a:schemeClr val="accent1">
+              <a:shade val="15000"/>
+            </a:schemeClr>
+          </a:lnRef>
+          <a:fillRef idx="1">
+            <a:schemeClr val="accent1"/>
+          </a:fillRef>
+          <a:effectRef idx="0">
+            <a:schemeClr val="accent1"/>
+          </a:effectRef>
+          <a:fontRef idx="minor">
+            <a:schemeClr val="lt1"/>
+          </a:fontRef>
+        </p:style>
+        <p:txBody>
+          <a:bodyPr rtlCol="0" anchor="ctr"/>
+          <a:lstStyle/>
+          <a:p>
+            <a:pPr algn="ctr"/>
+            <a:r>
+              <a:rPr kumimoji="1" lang="en-US" altLang="ko-KR" sz="800">
+                <a:solidFill>
+                  <a:schemeClr val="tx1"/>
+                </a:solidFill>
+              </a:rPr>
+              <a:t>Filter Chain Manager</a:t>
+            </a:r>
+            <a:endParaRPr kumimoji="1" lang="ko-KR" altLang="en-US" sz="800">
+              <a:solidFill>
+                <a:schemeClr val="tx1"/>
+              </a:solidFill>
+            </a:endParaRPr>
+          </a:p>
+        </p:txBody>
+      </p:sp>
+      <p:cxnSp>
+        <p:nvCxnSpPr>
+          <p:cNvPr id="31" name="직선 화살표 연결선 30">
+            <a:extLst>
+              <a:ext uri="{FF2B5EF4-FFF2-40B4-BE49-F238E27FC236}">
+                <a16:creationId xmlns:a16="http://schemas.microsoft.com/office/drawing/2014/main" id="{9FFD92DC-CCF5-01DA-2F4A-43CA12D9CAB4}"/>
+              </a:ext>
+            </a:extLst>
+          </p:cNvPr>
+          <p:cNvCxnSpPr>
+            <a:cxnSpLocks/>
+          </p:cNvCxnSpPr>
+          <p:nvPr/>
+        </p:nvCxnSpPr>
+        <p:spPr>
+          <a:xfrm>
+            <a:off x="2195737" y="2798621"/>
+            <a:ext cx="0" cy="370887"/>
+          </a:xfrm>
+          <a:prstGeom prst="straightConnector1">
+            <a:avLst/>
+          </a:prstGeom>
+          <a:ln w="12700">
+            <a:solidFill>
+              <a:schemeClr val="accent1"/>
+            </a:solidFill>
+            <a:tailEnd type="triangle"/>
+          </a:ln>
+        </p:spPr>
+        <p:style>
+          <a:lnRef idx="1">
+            <a:schemeClr val="accent1"/>
+          </a:lnRef>
+          <a:fillRef idx="0">
+            <a:schemeClr val="accent1"/>
+          </a:fillRef>
+          <a:effectRef idx="0">
+            <a:schemeClr val="accent1"/>
+          </a:effectRef>
+          <a:fontRef idx="minor">
+            <a:schemeClr val="tx1"/>
+          </a:fontRef>
+        </p:style>
+      </p:cxnSp>
+      <p:sp>
+        <p:nvSpPr>
+          <p:cNvPr id="37" name="모서리가 둥근 직사각형 36">
+            <a:extLst>
+              <a:ext uri="{FF2B5EF4-FFF2-40B4-BE49-F238E27FC236}">
+                <a16:creationId xmlns:a16="http://schemas.microsoft.com/office/drawing/2014/main" id="{E2BAC641-C58B-4174-E4FC-7635E3F72E84}"/>
+              </a:ext>
+            </a:extLst>
+          </p:cNvPr>
+          <p:cNvSpPr/>
+          <p:nvPr/>
+        </p:nvSpPr>
+        <p:spPr>
+          <a:xfrm>
+            <a:off x="3070436" y="968667"/>
+            <a:ext cx="4477732" cy="3259266"/>
+          </a:xfrm>
+          <a:prstGeom prst="roundRect">
+            <a:avLst>
+              <a:gd name="adj" fmla="val 3704"/>
+            </a:avLst>
+          </a:prstGeom>
+          <a:solidFill>
+            <a:schemeClr val="bg1">
+              <a:lumMod val="95000"/>
+            </a:schemeClr>
+          </a:solidFill>
+          <a:ln w="12700">
+            <a:prstDash val="dash"/>
+          </a:ln>
+        </p:spPr>
+        <p:style>
+          <a:lnRef idx="2">
+            <a:schemeClr val="accent1">
+              <a:shade val="15000"/>
+            </a:schemeClr>
+          </a:lnRef>
+          <a:fillRef idx="1">
+            <a:schemeClr val="accent1"/>
+          </a:fillRef>
+          <a:effectRef idx="0">
+            <a:schemeClr val="accent1"/>
+          </a:effectRef>
+          <a:fontRef idx="minor">
+            <a:schemeClr val="lt1"/>
+          </a:fontRef>
+        </p:style>
+        <p:txBody>
+          <a:bodyPr rtlCol="0" anchor="t"/>
+          <a:lstStyle/>
+          <a:p>
+            <a:pPr algn="ctr"/>
+            <a:r>
+              <a:rPr kumimoji="1" lang="en-US" altLang="ko-KR" sz="900">
+                <a:solidFill>
+                  <a:schemeClr val="tx1"/>
+                </a:solidFill>
+              </a:rPr>
+              <a:t>Per Downstream Connection State </a:t>
+            </a:r>
+            <a:endParaRPr kumimoji="1" lang="ko-KR" altLang="en-US" sz="900">
+              <a:solidFill>
+                <a:schemeClr val="tx1"/>
+              </a:solidFill>
+            </a:endParaRPr>
+          </a:p>
+        </p:txBody>
+      </p:sp>
+      <p:sp>
+        <p:nvSpPr>
+          <p:cNvPr id="7" name="모서리가 둥근 직사각형 6">
+            <a:extLst>
+              <a:ext uri="{FF2B5EF4-FFF2-40B4-BE49-F238E27FC236}">
+                <a16:creationId xmlns:a16="http://schemas.microsoft.com/office/drawing/2014/main" id="{AB261467-36A1-8D46-23A9-EE2E9A93F693}"/>
+              </a:ext>
+            </a:extLst>
+          </p:cNvPr>
+          <p:cNvSpPr/>
+          <p:nvPr/>
+        </p:nvSpPr>
+        <p:spPr>
+          <a:xfrm>
+            <a:off x="3159784" y="1274889"/>
+            <a:ext cx="3140408" cy="639298"/>
+          </a:xfrm>
+          <a:prstGeom prst="roundRect">
+            <a:avLst>
+              <a:gd name="adj" fmla="val 6920"/>
+            </a:avLst>
+          </a:prstGeom>
+          <a:solidFill>
+            <a:schemeClr val="bg2">
+              <a:lumMod val="90000"/>
+            </a:schemeClr>
+          </a:solidFill>
+          <a:ln w="12700">
+            <a:prstDash val="dash"/>
+          </a:ln>
+        </p:spPr>
+        <p:style>
+          <a:lnRef idx="2">
+            <a:schemeClr val="accent1">
+              <a:shade val="15000"/>
+            </a:schemeClr>
+          </a:lnRef>
+          <a:fillRef idx="1">
+            <a:schemeClr val="accent1"/>
+          </a:fillRef>
+          <a:effectRef idx="0">
+            <a:schemeClr val="accent1"/>
+          </a:effectRef>
+          <a:fontRef idx="minor">
+            <a:schemeClr val="lt1"/>
+          </a:fontRef>
+        </p:style>
+        <p:txBody>
+          <a:bodyPr rtlCol="0" anchor="t"/>
+          <a:lstStyle/>
+          <a:p>
+            <a:pPr algn="ctr"/>
+            <a:r>
+              <a:rPr kumimoji="1" lang="en-US" altLang="ko-KR" sz="900">
+                <a:solidFill>
+                  <a:schemeClr val="tx1"/>
+                </a:solidFill>
+              </a:rPr>
+              <a:t>Listener Filters</a:t>
+            </a:r>
+            <a:endParaRPr kumimoji="1" lang="ko-KR" altLang="en-US" sz="900">
+              <a:solidFill>
+                <a:schemeClr val="tx1"/>
+              </a:solidFill>
+            </a:endParaRPr>
+          </a:p>
+        </p:txBody>
+      </p:sp>
+      <p:sp>
+        <p:nvSpPr>
+          <p:cNvPr id="41" name="모서리가 둥근 직사각형 40">
+            <a:extLst>
+              <a:ext uri="{FF2B5EF4-FFF2-40B4-BE49-F238E27FC236}">
+                <a16:creationId xmlns:a16="http://schemas.microsoft.com/office/drawing/2014/main" id="{A18D0F4D-4F93-4AAC-C377-4171470FD6BA}"/>
+              </a:ext>
+            </a:extLst>
+          </p:cNvPr>
+          <p:cNvSpPr/>
+          <p:nvPr/>
+        </p:nvSpPr>
+        <p:spPr>
+          <a:xfrm>
+            <a:off x="3159784" y="2238523"/>
+            <a:ext cx="3124284" cy="1898496"/>
+          </a:xfrm>
+          <a:prstGeom prst="roundRect">
+            <a:avLst>
+              <a:gd name="adj" fmla="val 6920"/>
+            </a:avLst>
+          </a:prstGeom>
+          <a:solidFill>
+            <a:schemeClr val="bg2">
+              <a:lumMod val="90000"/>
+            </a:schemeClr>
+          </a:solidFill>
+          <a:ln w="12700">
+            <a:prstDash val="dash"/>
+          </a:ln>
+        </p:spPr>
+        <p:style>
+          <a:lnRef idx="2">
+            <a:schemeClr val="accent1">
+              <a:shade val="15000"/>
+            </a:schemeClr>
+          </a:lnRef>
+          <a:fillRef idx="1">
+            <a:schemeClr val="accent1"/>
+          </a:fillRef>
+          <a:effectRef idx="0">
+            <a:schemeClr val="accent1"/>
+          </a:effectRef>
+          <a:fontRef idx="minor">
+            <a:schemeClr val="lt1"/>
+          </a:fontRef>
+        </p:style>
+        <p:txBody>
+          <a:bodyPr rtlCol="0" anchor="t"/>
+          <a:lstStyle/>
+          <a:p>
+            <a:pPr algn="ctr"/>
+            <a:r>
+              <a:rPr kumimoji="1" lang="en-US" altLang="ko-KR" sz="900">
+                <a:solidFill>
+                  <a:schemeClr val="tx1"/>
+                </a:solidFill>
+              </a:rPr>
+              <a:t>Network Filters</a:t>
+            </a:r>
+            <a:endParaRPr kumimoji="1" lang="ko-KR" altLang="en-US" sz="900">
+              <a:solidFill>
+                <a:schemeClr val="tx1"/>
+              </a:solidFill>
+            </a:endParaRPr>
+          </a:p>
+        </p:txBody>
+      </p:sp>
+      <p:sp>
+        <p:nvSpPr>
+          <p:cNvPr id="42" name="모서리가 둥근 직사각형 41">
+            <a:extLst>
+              <a:ext uri="{FF2B5EF4-FFF2-40B4-BE49-F238E27FC236}">
+                <a16:creationId xmlns:a16="http://schemas.microsoft.com/office/drawing/2014/main" id="{8A40BD44-CE8D-685B-E2C7-74BCD7A5B0FB}"/>
+              </a:ext>
+            </a:extLst>
+          </p:cNvPr>
+          <p:cNvSpPr/>
+          <p:nvPr/>
+        </p:nvSpPr>
+        <p:spPr>
+          <a:xfrm>
+            <a:off x="3247153" y="3003093"/>
+            <a:ext cx="2947533" cy="1049855"/>
+          </a:xfrm>
+          <a:prstGeom prst="roundRect">
+            <a:avLst>
+              <a:gd name="adj" fmla="val 10335"/>
+            </a:avLst>
+          </a:prstGeom>
+          <a:solidFill>
+            <a:schemeClr val="bg1"/>
+          </a:solidFill>
+          <a:ln w="12700"/>
+        </p:spPr>
+        <p:style>
+          <a:lnRef idx="2">
+            <a:schemeClr val="accent1">
+              <a:shade val="15000"/>
+            </a:schemeClr>
+          </a:lnRef>
+          <a:fillRef idx="1">
+            <a:schemeClr val="accent1"/>
+          </a:fillRef>
+          <a:effectRef idx="0">
+            <a:schemeClr val="accent1"/>
+          </a:effectRef>
+          <a:fontRef idx="minor">
+            <a:schemeClr val="lt1"/>
+          </a:fontRef>
+        </p:style>
+        <p:txBody>
+          <a:bodyPr rtlCol="0" anchor="t"/>
+          <a:lstStyle/>
+          <a:p>
+            <a:pPr algn="ctr"/>
+            <a:r>
+              <a:rPr kumimoji="1" lang="en-US" altLang="ko-KR" sz="800">
+                <a:solidFill>
+                  <a:schemeClr val="tx1"/>
+                </a:solidFill>
+              </a:rPr>
+              <a:t>HCM</a:t>
+            </a:r>
+            <a:endParaRPr kumimoji="1" lang="ko-KR" altLang="en-US" sz="800">
+              <a:solidFill>
+                <a:schemeClr val="tx1"/>
+              </a:solidFill>
+            </a:endParaRPr>
+          </a:p>
+        </p:txBody>
+      </p:sp>
+      <p:sp>
+        <p:nvSpPr>
+          <p:cNvPr id="43" name="모서리가 둥근 직사각형 42">
+            <a:extLst>
+              <a:ext uri="{FF2B5EF4-FFF2-40B4-BE49-F238E27FC236}">
+                <a16:creationId xmlns:a16="http://schemas.microsoft.com/office/drawing/2014/main" id="{38869F4B-716C-B79D-9CD3-522FF528D3BF}"/>
+              </a:ext>
+            </a:extLst>
+          </p:cNvPr>
+          <p:cNvSpPr/>
+          <p:nvPr/>
+        </p:nvSpPr>
+        <p:spPr>
+          <a:xfrm>
+            <a:off x="4411750" y="2507185"/>
+            <a:ext cx="801642" cy="306783"/>
+          </a:xfrm>
+          <a:prstGeom prst="roundRect">
+            <a:avLst>
+              <a:gd name="adj" fmla="val 19601"/>
+            </a:avLst>
+          </a:prstGeom>
+          <a:solidFill>
+            <a:schemeClr val="bg1"/>
+          </a:solidFill>
+          <a:ln w="12700"/>
+        </p:spPr>
+        <p:style>
+          <a:lnRef idx="2">
+            <a:schemeClr val="accent1">
+              <a:shade val="15000"/>
+            </a:schemeClr>
+          </a:lnRef>
+          <a:fillRef idx="1">
+            <a:schemeClr val="accent1"/>
+          </a:fillRef>
+          <a:effectRef idx="0">
+            <a:schemeClr val="accent1"/>
+          </a:effectRef>
+          <a:fontRef idx="minor">
+            <a:schemeClr val="lt1"/>
+          </a:fontRef>
+        </p:style>
+        <p:txBody>
+          <a:bodyPr rtlCol="0" anchor="ctr"/>
+          <a:lstStyle/>
+          <a:p>
+            <a:pPr algn="ctr"/>
+            <a:r>
+              <a:rPr kumimoji="1" lang="en-US" altLang="ko-KR" sz="800">
+                <a:solidFill>
+                  <a:schemeClr val="tx1"/>
+                </a:solidFill>
+              </a:rPr>
+              <a:t>Rate Limit</a:t>
+            </a:r>
+            <a:endParaRPr kumimoji="1" lang="ko-KR" altLang="en-US" sz="800">
+              <a:solidFill>
+                <a:schemeClr val="tx1"/>
+              </a:solidFill>
+            </a:endParaRPr>
+          </a:p>
+        </p:txBody>
+      </p:sp>
+      <p:sp>
+        <p:nvSpPr>
+          <p:cNvPr id="44" name="모서리가 둥근 직사각형 43">
+            <a:extLst>
+              <a:ext uri="{FF2B5EF4-FFF2-40B4-BE49-F238E27FC236}">
+                <a16:creationId xmlns:a16="http://schemas.microsoft.com/office/drawing/2014/main" id="{CFF41EDF-E5E7-55CA-D574-122E1F3CE731}"/>
+              </a:ext>
+            </a:extLst>
+          </p:cNvPr>
+          <p:cNvSpPr/>
+          <p:nvPr/>
+        </p:nvSpPr>
+        <p:spPr>
+          <a:xfrm>
+            <a:off x="3251265" y="2507184"/>
+            <a:ext cx="801642" cy="306783"/>
+          </a:xfrm>
+          <a:prstGeom prst="roundRect">
+            <a:avLst>
+              <a:gd name="adj" fmla="val 19601"/>
+            </a:avLst>
+          </a:prstGeom>
+          <a:solidFill>
+            <a:schemeClr val="bg1"/>
+          </a:solidFill>
+          <a:ln w="12700"/>
+        </p:spPr>
+        <p:style>
+          <a:lnRef idx="2">
+            <a:schemeClr val="accent1">
+              <a:shade val="15000"/>
+            </a:schemeClr>
+          </a:lnRef>
+          <a:fillRef idx="1">
+            <a:schemeClr val="accent1"/>
+          </a:fillRef>
+          <a:effectRef idx="0">
+            <a:schemeClr val="accent1"/>
+          </a:effectRef>
+          <a:fontRef idx="minor">
+            <a:schemeClr val="lt1"/>
+          </a:fontRef>
+        </p:style>
+        <p:txBody>
+          <a:bodyPr rtlCol="0" anchor="ctr"/>
+          <a:lstStyle/>
+          <a:p>
+            <a:pPr algn="ctr"/>
+            <a:r>
+              <a:rPr kumimoji="1" lang="en-US" altLang="ko-KR" sz="800">
+                <a:solidFill>
+                  <a:schemeClr val="tx1"/>
+                </a:solidFill>
+              </a:rPr>
+              <a:t>Connection</a:t>
+            </a:r>
+          </a:p>
+          <a:p>
+            <a:pPr algn="ctr"/>
+            <a:r>
+              <a:rPr kumimoji="1" lang="en-US" altLang="ko-KR" sz="800">
+                <a:solidFill>
+                  <a:schemeClr val="tx1"/>
+                </a:solidFill>
+              </a:rPr>
+              <a:t>Limit</a:t>
+            </a:r>
+            <a:endParaRPr kumimoji="1" lang="ko-KR" altLang="en-US" sz="800">
+              <a:solidFill>
+                <a:schemeClr val="tx1"/>
+              </a:solidFill>
+            </a:endParaRPr>
+          </a:p>
+        </p:txBody>
+      </p:sp>
+      <p:sp>
+        <p:nvSpPr>
+          <p:cNvPr id="45" name="모서리가 둥근 직사각형 44">
+            <a:extLst>
+              <a:ext uri="{FF2B5EF4-FFF2-40B4-BE49-F238E27FC236}">
+                <a16:creationId xmlns:a16="http://schemas.microsoft.com/office/drawing/2014/main" id="{A3E08CE1-C051-789F-8BF9-27C27843E460}"/>
+              </a:ext>
+            </a:extLst>
+          </p:cNvPr>
+          <p:cNvSpPr/>
+          <p:nvPr/>
+        </p:nvSpPr>
+        <p:spPr>
+          <a:xfrm>
+            <a:off x="5393043" y="2507183"/>
+            <a:ext cx="801642" cy="306783"/>
+          </a:xfrm>
+          <a:prstGeom prst="roundRect">
+            <a:avLst>
+              <a:gd name="adj" fmla="val 19601"/>
+            </a:avLst>
+          </a:prstGeom>
+          <a:solidFill>
+            <a:schemeClr val="bg1"/>
+          </a:solidFill>
+          <a:ln w="12700"/>
+        </p:spPr>
+        <p:style>
+          <a:lnRef idx="2">
+            <a:schemeClr val="accent1">
+              <a:shade val="15000"/>
+            </a:schemeClr>
+          </a:lnRef>
+          <a:fillRef idx="1">
+            <a:schemeClr val="accent1"/>
+          </a:fillRef>
+          <a:effectRef idx="0">
+            <a:schemeClr val="accent1"/>
+          </a:effectRef>
+          <a:fontRef idx="minor">
+            <a:schemeClr val="lt1"/>
+          </a:fontRef>
+        </p:style>
+        <p:txBody>
+          <a:bodyPr rtlCol="0" anchor="ctr"/>
+          <a:lstStyle/>
+          <a:p>
+            <a:pPr algn="ctr"/>
+            <a:r>
+              <a:rPr kumimoji="1" lang="en-US" altLang="ko-KR" sz="800">
+                <a:solidFill>
+                  <a:schemeClr val="tx1"/>
+                </a:solidFill>
+              </a:rPr>
+              <a:t>Rate Limit</a:t>
+            </a:r>
+            <a:endParaRPr kumimoji="1" lang="ko-KR" altLang="en-US" sz="800">
+              <a:solidFill>
+                <a:schemeClr val="tx1"/>
+              </a:solidFill>
+            </a:endParaRPr>
+          </a:p>
+        </p:txBody>
+      </p:sp>
+      <p:sp>
+        <p:nvSpPr>
+          <p:cNvPr id="34" name="모서리가 둥근 직사각형 33">
+            <a:extLst>
+              <a:ext uri="{FF2B5EF4-FFF2-40B4-BE49-F238E27FC236}">
+                <a16:creationId xmlns:a16="http://schemas.microsoft.com/office/drawing/2014/main" id="{653D62ED-524E-4B89-6267-C3720FCA9DA3}"/>
+              </a:ext>
+            </a:extLst>
+          </p:cNvPr>
+          <p:cNvSpPr/>
+          <p:nvPr/>
+        </p:nvSpPr>
+        <p:spPr>
+          <a:xfrm>
+            <a:off x="5393044" y="1527491"/>
+            <a:ext cx="801642" cy="306783"/>
+          </a:xfrm>
+          <a:prstGeom prst="roundRect">
+            <a:avLst>
+              <a:gd name="adj" fmla="val 19601"/>
+            </a:avLst>
+          </a:prstGeom>
+          <a:solidFill>
+            <a:schemeClr val="bg1"/>
+          </a:solidFill>
+          <a:ln w="12700"/>
+        </p:spPr>
+        <p:style>
+          <a:lnRef idx="2">
+            <a:schemeClr val="accent1">
+              <a:shade val="15000"/>
+            </a:schemeClr>
+          </a:lnRef>
+          <a:fillRef idx="1">
+            <a:schemeClr val="accent1"/>
+          </a:fillRef>
+          <a:effectRef idx="0">
+            <a:schemeClr val="accent1"/>
+          </a:effectRef>
+          <a:fontRef idx="minor">
+            <a:schemeClr val="lt1"/>
+          </a:fontRef>
+        </p:style>
+        <p:txBody>
+          <a:bodyPr rtlCol="0" anchor="ctr"/>
+          <a:lstStyle/>
+          <a:p>
+            <a:pPr algn="ctr"/>
+            <a:r>
+              <a:rPr kumimoji="1" lang="en-US" altLang="ko-KR" sz="800">
+                <a:solidFill>
+                  <a:schemeClr val="tx1"/>
+                </a:solidFill>
+              </a:rPr>
+              <a:t>TLS Inspector</a:t>
+            </a:r>
+            <a:endParaRPr kumimoji="1" lang="ko-KR" altLang="en-US" sz="800">
+              <a:solidFill>
+                <a:schemeClr val="tx1"/>
+              </a:solidFill>
+            </a:endParaRPr>
+          </a:p>
+        </p:txBody>
+      </p:sp>
+      <p:sp>
+        <p:nvSpPr>
+          <p:cNvPr id="35" name="모서리가 둥근 직사각형 34">
+            <a:extLst>
+              <a:ext uri="{FF2B5EF4-FFF2-40B4-BE49-F238E27FC236}">
+                <a16:creationId xmlns:a16="http://schemas.microsoft.com/office/drawing/2014/main" id="{AB04B119-3E75-E460-0736-03E0BD9CE064}"/>
+              </a:ext>
+            </a:extLst>
+          </p:cNvPr>
+          <p:cNvSpPr/>
+          <p:nvPr/>
+        </p:nvSpPr>
+        <p:spPr>
+          <a:xfrm>
+            <a:off x="4413808" y="1529255"/>
+            <a:ext cx="801642" cy="306783"/>
+          </a:xfrm>
+          <a:prstGeom prst="roundRect">
+            <a:avLst>
+              <a:gd name="adj" fmla="val 19601"/>
+            </a:avLst>
+          </a:prstGeom>
+          <a:solidFill>
+            <a:schemeClr val="bg1"/>
+          </a:solidFill>
+          <a:ln w="12700"/>
+        </p:spPr>
+        <p:style>
+          <a:lnRef idx="2">
+            <a:schemeClr val="accent1">
+              <a:shade val="15000"/>
+            </a:schemeClr>
+          </a:lnRef>
+          <a:fillRef idx="1">
+            <a:schemeClr val="accent1"/>
+          </a:fillRef>
+          <a:effectRef idx="0">
+            <a:schemeClr val="accent1"/>
+          </a:effectRef>
+          <a:fontRef idx="minor">
+            <a:schemeClr val="lt1"/>
+          </a:fontRef>
+        </p:style>
+        <p:txBody>
+          <a:bodyPr rtlCol="0" anchor="ctr"/>
+          <a:lstStyle/>
+          <a:p>
+            <a:pPr algn="ctr"/>
+            <a:r>
+              <a:rPr kumimoji="1" lang="en-US" altLang="ko-KR" sz="800">
+                <a:solidFill>
+                  <a:schemeClr val="tx1"/>
+                </a:solidFill>
+              </a:rPr>
+              <a:t>Proxy</a:t>
+            </a:r>
+          </a:p>
+          <a:p>
+            <a:pPr algn="ctr"/>
+            <a:r>
+              <a:rPr kumimoji="1" lang="en-US" altLang="ko-KR" sz="800">
+                <a:solidFill>
+                  <a:schemeClr val="tx1"/>
+                </a:solidFill>
+              </a:rPr>
+              <a:t>Protocol</a:t>
+            </a:r>
+            <a:endParaRPr kumimoji="1" lang="ko-KR" altLang="en-US" sz="800">
+              <a:solidFill>
+                <a:schemeClr val="tx1"/>
+              </a:solidFill>
+            </a:endParaRPr>
+          </a:p>
+        </p:txBody>
+      </p:sp>
+      <p:sp>
+        <p:nvSpPr>
+          <p:cNvPr id="36" name="모서리가 둥근 직사각형 35">
+            <a:extLst>
+              <a:ext uri="{FF2B5EF4-FFF2-40B4-BE49-F238E27FC236}">
+                <a16:creationId xmlns:a16="http://schemas.microsoft.com/office/drawing/2014/main" id="{999E8414-2420-5D2E-1EBC-17F6EF46F0B1}"/>
+              </a:ext>
+            </a:extLst>
+          </p:cNvPr>
+          <p:cNvSpPr/>
+          <p:nvPr/>
+        </p:nvSpPr>
+        <p:spPr>
+          <a:xfrm>
+            <a:off x="3256384" y="1529255"/>
+            <a:ext cx="801642" cy="306783"/>
+          </a:xfrm>
+          <a:prstGeom prst="roundRect">
+            <a:avLst>
+              <a:gd name="adj" fmla="val 19601"/>
+            </a:avLst>
+          </a:prstGeom>
+          <a:solidFill>
+            <a:schemeClr val="bg1"/>
+          </a:solidFill>
+          <a:ln w="12700"/>
+        </p:spPr>
+        <p:style>
+          <a:lnRef idx="2">
+            <a:schemeClr val="accent1">
+              <a:shade val="15000"/>
+            </a:schemeClr>
+          </a:lnRef>
+          <a:fillRef idx="1">
+            <a:schemeClr val="accent1"/>
+          </a:fillRef>
+          <a:effectRef idx="0">
+            <a:schemeClr val="accent1"/>
+          </a:effectRef>
+          <a:fontRef idx="minor">
+            <a:schemeClr val="lt1"/>
+          </a:fontRef>
+        </p:style>
+        <p:txBody>
+          <a:bodyPr rtlCol="0" anchor="ctr"/>
+          <a:lstStyle/>
+          <a:p>
+            <a:pPr algn="ctr"/>
+            <a:r>
+              <a:rPr kumimoji="1" lang="en-US" altLang="ko-KR" sz="800">
+                <a:solidFill>
+                  <a:schemeClr val="tx1"/>
+                </a:solidFill>
+              </a:rPr>
+              <a:t>Original</a:t>
+            </a:r>
+          </a:p>
+          <a:p>
+            <a:pPr algn="ctr"/>
+            <a:r>
+              <a:rPr kumimoji="1" lang="en-US" altLang="ko-KR" sz="800">
+                <a:solidFill>
+                  <a:schemeClr val="tx1"/>
+                </a:solidFill>
+              </a:rPr>
+              <a:t>Dst</a:t>
+            </a:r>
+            <a:endParaRPr kumimoji="1" lang="ko-KR" altLang="en-US" sz="800">
+              <a:solidFill>
+                <a:schemeClr val="tx1"/>
+              </a:solidFill>
+            </a:endParaRPr>
+          </a:p>
+        </p:txBody>
+      </p:sp>
+      <p:sp>
+        <p:nvSpPr>
+          <p:cNvPr id="47" name="모서리가 둥근 직사각형 46">
+            <a:extLst>
+              <a:ext uri="{FF2B5EF4-FFF2-40B4-BE49-F238E27FC236}">
+                <a16:creationId xmlns:a16="http://schemas.microsoft.com/office/drawing/2014/main" id="{86548305-4DD2-F577-9DDA-D99E7C441310}"/>
+              </a:ext>
+            </a:extLst>
+          </p:cNvPr>
+          <p:cNvSpPr/>
+          <p:nvPr/>
+        </p:nvSpPr>
+        <p:spPr>
+          <a:xfrm>
+            <a:off x="3337193" y="3611983"/>
+            <a:ext cx="801642" cy="306783"/>
+          </a:xfrm>
+          <a:prstGeom prst="roundRect">
+            <a:avLst>
+              <a:gd name="adj" fmla="val 19601"/>
+            </a:avLst>
+          </a:prstGeom>
+          <a:solidFill>
+            <a:schemeClr val="bg1"/>
+          </a:solidFill>
+          <a:ln w="12700"/>
+        </p:spPr>
+        <p:style>
+          <a:lnRef idx="2">
+            <a:schemeClr val="accent1">
+              <a:shade val="15000"/>
+            </a:schemeClr>
+          </a:lnRef>
+          <a:fillRef idx="1">
+            <a:schemeClr val="accent1"/>
+          </a:fillRef>
+          <a:effectRef idx="0">
+            <a:schemeClr val="accent1"/>
+          </a:effectRef>
+          <a:fontRef idx="minor">
+            <a:schemeClr val="lt1"/>
+          </a:fontRef>
+        </p:style>
+        <p:txBody>
+          <a:bodyPr rtlCol="0" anchor="ctr"/>
+          <a:lstStyle/>
+          <a:p>
+            <a:pPr algn="ctr"/>
+            <a:r>
+              <a:rPr kumimoji="1" lang="en-US" altLang="ko-KR" sz="800">
+                <a:solidFill>
+                  <a:schemeClr val="tx1"/>
+                </a:solidFill>
+              </a:rPr>
+              <a:t>HTTP</a:t>
+            </a:r>
+          </a:p>
+          <a:p>
+            <a:pPr algn="ctr"/>
+            <a:r>
+              <a:rPr kumimoji="1" lang="en-US" altLang="ko-KR" sz="800">
+                <a:solidFill>
+                  <a:schemeClr val="tx1"/>
+                </a:solidFill>
+              </a:rPr>
+              <a:t>Codec</a:t>
+            </a:r>
+            <a:endParaRPr kumimoji="1" lang="ko-KR" altLang="en-US" sz="800">
+              <a:solidFill>
+                <a:schemeClr val="tx1"/>
+              </a:solidFill>
+            </a:endParaRPr>
+          </a:p>
+        </p:txBody>
+      </p:sp>
+      <p:sp>
+        <p:nvSpPr>
+          <p:cNvPr id="38" name="타원 37">
+            <a:extLst>
+              <a:ext uri="{FF2B5EF4-FFF2-40B4-BE49-F238E27FC236}">
+                <a16:creationId xmlns:a16="http://schemas.microsoft.com/office/drawing/2014/main" id="{A304BBBB-1C10-2E7C-2BDD-917B43825F7A}"/>
+              </a:ext>
+            </a:extLst>
+          </p:cNvPr>
+          <p:cNvSpPr/>
+          <p:nvPr/>
+        </p:nvSpPr>
+        <p:spPr>
+          <a:xfrm flipH="1" flipV="1">
+            <a:off x="4112995" y="1658022"/>
+            <a:ext cx="51681" cy="45719"/>
+          </a:xfrm>
+          <a:prstGeom prst="ellipse">
+            <a:avLst/>
+          </a:prstGeom>
+          <a:solidFill>
+            <a:schemeClr val="tx1"/>
+          </a:solidFill>
+          <a:ln>
+            <a:noFill/>
+          </a:ln>
+        </p:spPr>
+        <p:style>
+          <a:lnRef idx="2">
+            <a:schemeClr val="accent1">
+              <a:shade val="15000"/>
+            </a:schemeClr>
+          </a:lnRef>
+          <a:fillRef idx="1">
+            <a:schemeClr val="accent1"/>
+          </a:fillRef>
+          <a:effectRef idx="0">
+            <a:schemeClr val="accent1"/>
+          </a:effectRef>
+          <a:fontRef idx="minor">
+            <a:schemeClr val="lt1"/>
+          </a:fontRef>
+        </p:style>
+        <p:txBody>
+          <a:bodyPr rtlCol="0" anchor="ctr"/>
+          <a:lstStyle/>
+          <a:p>
+            <a:pPr algn="ctr"/>
+            <a:endParaRPr kumimoji="1" lang="ko-KR" altLang="en-US"/>
+          </a:p>
+        </p:txBody>
+      </p:sp>
+      <p:sp>
+        <p:nvSpPr>
+          <p:cNvPr id="39" name="타원 38">
+            <a:extLst>
+              <a:ext uri="{FF2B5EF4-FFF2-40B4-BE49-F238E27FC236}">
+                <a16:creationId xmlns:a16="http://schemas.microsoft.com/office/drawing/2014/main" id="{47684505-577D-9EF6-EBA6-12957ABD3BF6}"/>
+              </a:ext>
+            </a:extLst>
+          </p:cNvPr>
+          <p:cNvSpPr/>
+          <p:nvPr/>
+        </p:nvSpPr>
+        <p:spPr>
+          <a:xfrm flipH="1" flipV="1">
+            <a:off x="4208826" y="1658495"/>
+            <a:ext cx="51681" cy="45719"/>
+          </a:xfrm>
+          <a:prstGeom prst="ellipse">
+            <a:avLst/>
+          </a:prstGeom>
+          <a:solidFill>
+            <a:schemeClr val="tx1"/>
+          </a:solidFill>
+          <a:ln>
+            <a:noFill/>
+          </a:ln>
+        </p:spPr>
+        <p:style>
+          <a:lnRef idx="2">
+            <a:schemeClr val="accent1">
+              <a:shade val="15000"/>
+            </a:schemeClr>
+          </a:lnRef>
+          <a:fillRef idx="1">
+            <a:schemeClr val="accent1"/>
+          </a:fillRef>
+          <a:effectRef idx="0">
+            <a:schemeClr val="accent1"/>
+          </a:effectRef>
+          <a:fontRef idx="minor">
+            <a:schemeClr val="lt1"/>
+          </a:fontRef>
+        </p:style>
+        <p:txBody>
+          <a:bodyPr rtlCol="0" anchor="ctr"/>
+          <a:lstStyle/>
+          <a:p>
+            <a:pPr algn="ctr"/>
+            <a:endParaRPr kumimoji="1" lang="ko-KR" altLang="en-US"/>
+          </a:p>
+        </p:txBody>
+      </p:sp>
+      <p:sp>
+        <p:nvSpPr>
+          <p:cNvPr id="40" name="타원 39">
+            <a:extLst>
+              <a:ext uri="{FF2B5EF4-FFF2-40B4-BE49-F238E27FC236}">
+                <a16:creationId xmlns:a16="http://schemas.microsoft.com/office/drawing/2014/main" id="{FBE34B6E-0BBD-5B35-6B3D-07A020A5B9C7}"/>
+              </a:ext>
+            </a:extLst>
+          </p:cNvPr>
+          <p:cNvSpPr/>
+          <p:nvPr/>
+        </p:nvSpPr>
+        <p:spPr>
+          <a:xfrm flipH="1" flipV="1">
+            <a:off x="4304656" y="1658021"/>
+            <a:ext cx="51681" cy="45719"/>
+          </a:xfrm>
+          <a:prstGeom prst="ellipse">
+            <a:avLst/>
+          </a:prstGeom>
+          <a:solidFill>
+            <a:schemeClr val="tx1"/>
+          </a:solidFill>
+          <a:ln>
+            <a:noFill/>
+          </a:ln>
+        </p:spPr>
+        <p:style>
+          <a:lnRef idx="2">
+            <a:schemeClr val="accent1">
+              <a:shade val="15000"/>
+            </a:schemeClr>
+          </a:lnRef>
+          <a:fillRef idx="1">
+            <a:schemeClr val="accent1"/>
+          </a:fillRef>
+          <a:effectRef idx="0">
+            <a:schemeClr val="accent1"/>
+          </a:effectRef>
+          <a:fontRef idx="minor">
+            <a:schemeClr val="lt1"/>
+          </a:fontRef>
+        </p:style>
+        <p:txBody>
+          <a:bodyPr rtlCol="0" anchor="ctr"/>
+          <a:lstStyle/>
+          <a:p>
+            <a:pPr algn="ctr"/>
+            <a:endParaRPr kumimoji="1" lang="ko-KR" altLang="en-US"/>
+          </a:p>
+        </p:txBody>
+      </p:sp>
+      <p:sp>
+        <p:nvSpPr>
+          <p:cNvPr id="50" name="모서리가 둥근 직사각형 49">
+            <a:extLst>
+              <a:ext uri="{FF2B5EF4-FFF2-40B4-BE49-F238E27FC236}">
+                <a16:creationId xmlns:a16="http://schemas.microsoft.com/office/drawing/2014/main" id="{62260E37-A050-396E-30C1-32C3E3F4401F}"/>
+              </a:ext>
+            </a:extLst>
+          </p:cNvPr>
+          <p:cNvSpPr/>
+          <p:nvPr/>
+        </p:nvSpPr>
+        <p:spPr>
+          <a:xfrm>
+            <a:off x="4226205" y="3311320"/>
+            <a:ext cx="1884616" cy="660849"/>
+          </a:xfrm>
+          <a:prstGeom prst="roundRect">
+            <a:avLst>
+              <a:gd name="adj" fmla="val 6920"/>
+            </a:avLst>
+          </a:prstGeom>
+          <a:solidFill>
+            <a:schemeClr val="bg1">
+              <a:lumMod val="85000"/>
+            </a:schemeClr>
+          </a:solidFill>
+          <a:ln w="12700">
+            <a:prstDash val="dash"/>
+          </a:ln>
+        </p:spPr>
+        <p:style>
+          <a:lnRef idx="2">
+            <a:schemeClr val="accent1">
+              <a:shade val="15000"/>
+            </a:schemeClr>
+          </a:lnRef>
+          <a:fillRef idx="1">
+            <a:schemeClr val="accent1"/>
+          </a:fillRef>
+          <a:effectRef idx="0">
+            <a:schemeClr val="accent1"/>
+          </a:effectRef>
+          <a:fontRef idx="minor">
+            <a:schemeClr val="lt1"/>
+          </a:fontRef>
+        </p:style>
+        <p:txBody>
+          <a:bodyPr rtlCol="0" anchor="t"/>
+          <a:lstStyle/>
+          <a:p>
+            <a:pPr algn="ctr"/>
+            <a:r>
+              <a:rPr kumimoji="1" lang="en-US" altLang="ko-KR" sz="900">
+                <a:solidFill>
+                  <a:schemeClr val="tx1"/>
+                </a:solidFill>
+              </a:rPr>
+              <a:t>Per Request/Stream State</a:t>
+            </a:r>
+            <a:endParaRPr kumimoji="1" lang="ko-KR" altLang="en-US" sz="900">
+              <a:solidFill>
+                <a:schemeClr val="tx1"/>
+              </a:solidFill>
+            </a:endParaRPr>
+          </a:p>
+        </p:txBody>
+      </p:sp>
+      <p:sp>
+        <p:nvSpPr>
+          <p:cNvPr id="51" name="모서리가 둥근 직사각형 50">
+            <a:extLst>
+              <a:ext uri="{FF2B5EF4-FFF2-40B4-BE49-F238E27FC236}">
+                <a16:creationId xmlns:a16="http://schemas.microsoft.com/office/drawing/2014/main" id="{7769F75C-CBE3-1058-098A-970D04254E04}"/>
+              </a:ext>
+            </a:extLst>
+          </p:cNvPr>
+          <p:cNvSpPr/>
+          <p:nvPr/>
+        </p:nvSpPr>
+        <p:spPr>
+          <a:xfrm>
+            <a:off x="4316245" y="3605655"/>
+            <a:ext cx="801642" cy="306783"/>
+          </a:xfrm>
+          <a:prstGeom prst="roundRect">
+            <a:avLst>
+              <a:gd name="adj" fmla="val 19601"/>
+            </a:avLst>
+          </a:prstGeom>
+          <a:solidFill>
+            <a:schemeClr val="bg1"/>
+          </a:solidFill>
+          <a:ln w="12700"/>
+        </p:spPr>
+        <p:style>
+          <a:lnRef idx="2">
+            <a:schemeClr val="accent1">
+              <a:shade val="15000"/>
+            </a:schemeClr>
+          </a:lnRef>
+          <a:fillRef idx="1">
+            <a:schemeClr val="accent1"/>
+          </a:fillRef>
+          <a:effectRef idx="0">
+            <a:schemeClr val="accent1"/>
+          </a:effectRef>
+          <a:fontRef idx="minor">
+            <a:schemeClr val="lt1"/>
+          </a:fontRef>
+        </p:style>
+        <p:txBody>
+          <a:bodyPr rtlCol="0" anchor="ctr"/>
+          <a:lstStyle/>
+          <a:p>
+            <a:pPr algn="ctr"/>
+            <a:r>
+              <a:rPr kumimoji="1" lang="en-US" altLang="ko-KR" sz="800">
+                <a:solidFill>
+                  <a:schemeClr val="tx1"/>
+                </a:solidFill>
+              </a:rPr>
+              <a:t>Downstream</a:t>
+            </a:r>
+          </a:p>
+          <a:p>
+            <a:pPr algn="ctr"/>
+            <a:r>
+              <a:rPr kumimoji="1" lang="en-US" altLang="ko-KR" sz="800">
+                <a:solidFill>
+                  <a:schemeClr val="tx1"/>
+                </a:solidFill>
+              </a:rPr>
+              <a:t>HTTP Filter</a:t>
+            </a:r>
+            <a:endParaRPr kumimoji="1" lang="ko-KR" altLang="en-US" sz="800">
+              <a:solidFill>
+                <a:schemeClr val="tx1"/>
+              </a:solidFill>
+            </a:endParaRPr>
+          </a:p>
+        </p:txBody>
+      </p:sp>
+      <p:sp>
+        <p:nvSpPr>
+          <p:cNvPr id="52" name="모서리가 둥근 직사각형 51">
+            <a:extLst>
+              <a:ext uri="{FF2B5EF4-FFF2-40B4-BE49-F238E27FC236}">
+                <a16:creationId xmlns:a16="http://schemas.microsoft.com/office/drawing/2014/main" id="{75347BF5-5647-8721-2978-7CDD5F73470B}"/>
+              </a:ext>
+            </a:extLst>
+          </p:cNvPr>
+          <p:cNvSpPr/>
+          <p:nvPr/>
+        </p:nvSpPr>
+        <p:spPr>
+          <a:xfrm>
+            <a:off x="5238354" y="3605653"/>
+            <a:ext cx="801642" cy="306783"/>
+          </a:xfrm>
+          <a:prstGeom prst="roundRect">
+            <a:avLst>
+              <a:gd name="adj" fmla="val 19601"/>
+            </a:avLst>
+          </a:prstGeom>
+          <a:solidFill>
+            <a:schemeClr val="bg1"/>
+          </a:solidFill>
+          <a:ln w="12700"/>
+        </p:spPr>
+        <p:style>
+          <a:lnRef idx="2">
+            <a:schemeClr val="accent1">
+              <a:shade val="15000"/>
+            </a:schemeClr>
+          </a:lnRef>
+          <a:fillRef idx="1">
+            <a:schemeClr val="accent1"/>
+          </a:fillRef>
+          <a:effectRef idx="0">
+            <a:schemeClr val="accent1"/>
+          </a:effectRef>
+          <a:fontRef idx="minor">
+            <a:schemeClr val="lt1"/>
+          </a:fontRef>
+        </p:style>
+        <p:txBody>
+          <a:bodyPr rtlCol="0" anchor="ctr"/>
+          <a:lstStyle/>
+          <a:p>
+            <a:pPr algn="ctr"/>
+            <a:r>
+              <a:rPr kumimoji="1" lang="en-US" altLang="ko-KR" sz="800">
+                <a:solidFill>
+                  <a:schemeClr val="tx1"/>
+                </a:solidFill>
+              </a:rPr>
+              <a:t>Router</a:t>
+            </a:r>
+            <a:endParaRPr kumimoji="1" lang="ko-KR" altLang="en-US" sz="800">
+              <a:solidFill>
+                <a:schemeClr val="tx1"/>
+              </a:solidFill>
+            </a:endParaRPr>
+          </a:p>
+        </p:txBody>
+      </p:sp>
+      <p:sp>
+        <p:nvSpPr>
+          <p:cNvPr id="53" name="타원 52">
+            <a:extLst>
+              <a:ext uri="{FF2B5EF4-FFF2-40B4-BE49-F238E27FC236}">
+                <a16:creationId xmlns:a16="http://schemas.microsoft.com/office/drawing/2014/main" id="{9BD034E3-BCB0-E699-2FB9-E20BF1D0E73C}"/>
+              </a:ext>
+            </a:extLst>
+          </p:cNvPr>
+          <p:cNvSpPr/>
+          <p:nvPr/>
+        </p:nvSpPr>
+        <p:spPr>
+          <a:xfrm flipH="1" flipV="1">
+            <a:off x="4112634" y="2643759"/>
+            <a:ext cx="51681" cy="45719"/>
+          </a:xfrm>
+          <a:prstGeom prst="ellipse">
+            <a:avLst/>
+          </a:prstGeom>
+          <a:solidFill>
+            <a:schemeClr val="tx1"/>
+          </a:solidFill>
+          <a:ln>
+            <a:noFill/>
+          </a:ln>
+        </p:spPr>
+        <p:style>
+          <a:lnRef idx="2">
+            <a:schemeClr val="accent1">
+              <a:shade val="15000"/>
+            </a:schemeClr>
+          </a:lnRef>
+          <a:fillRef idx="1">
+            <a:schemeClr val="accent1"/>
+          </a:fillRef>
+          <a:effectRef idx="0">
+            <a:schemeClr val="accent1"/>
+          </a:effectRef>
+          <a:fontRef idx="minor">
+            <a:schemeClr val="lt1"/>
+          </a:fontRef>
+        </p:style>
+        <p:txBody>
+          <a:bodyPr rtlCol="0" anchor="ctr"/>
+          <a:lstStyle/>
+          <a:p>
+            <a:pPr algn="ctr"/>
+            <a:endParaRPr kumimoji="1" lang="ko-KR" altLang="en-US"/>
+          </a:p>
+        </p:txBody>
+      </p:sp>
+      <p:sp>
+        <p:nvSpPr>
+          <p:cNvPr id="54" name="타원 53">
+            <a:extLst>
+              <a:ext uri="{FF2B5EF4-FFF2-40B4-BE49-F238E27FC236}">
+                <a16:creationId xmlns:a16="http://schemas.microsoft.com/office/drawing/2014/main" id="{DCFCC3EA-FB49-EA11-130D-6ECC64DC3F52}"/>
+              </a:ext>
+            </a:extLst>
+          </p:cNvPr>
+          <p:cNvSpPr/>
+          <p:nvPr/>
+        </p:nvSpPr>
+        <p:spPr>
+          <a:xfrm flipH="1" flipV="1">
+            <a:off x="4208465" y="2644232"/>
+            <a:ext cx="51681" cy="45719"/>
+          </a:xfrm>
+          <a:prstGeom prst="ellipse">
+            <a:avLst/>
+          </a:prstGeom>
+          <a:solidFill>
+            <a:schemeClr val="tx1"/>
+          </a:solidFill>
+          <a:ln>
+            <a:noFill/>
+          </a:ln>
+        </p:spPr>
+        <p:style>
+          <a:lnRef idx="2">
+            <a:schemeClr val="accent1">
+              <a:shade val="15000"/>
+            </a:schemeClr>
+          </a:lnRef>
+          <a:fillRef idx="1">
+            <a:schemeClr val="accent1"/>
+          </a:fillRef>
+          <a:effectRef idx="0">
+            <a:schemeClr val="accent1"/>
+          </a:effectRef>
+          <a:fontRef idx="minor">
+            <a:schemeClr val="lt1"/>
+          </a:fontRef>
+        </p:style>
+        <p:txBody>
+          <a:bodyPr rtlCol="0" anchor="ctr"/>
+          <a:lstStyle/>
+          <a:p>
+            <a:pPr algn="ctr"/>
+            <a:endParaRPr kumimoji="1" lang="ko-KR" altLang="en-US"/>
+          </a:p>
+        </p:txBody>
+      </p:sp>
+      <p:sp>
+        <p:nvSpPr>
+          <p:cNvPr id="55" name="타원 54">
+            <a:extLst>
+              <a:ext uri="{FF2B5EF4-FFF2-40B4-BE49-F238E27FC236}">
+                <a16:creationId xmlns:a16="http://schemas.microsoft.com/office/drawing/2014/main" id="{9F7A72F3-259D-0217-C5D2-373F684CBF8C}"/>
+              </a:ext>
+            </a:extLst>
+          </p:cNvPr>
+          <p:cNvSpPr/>
+          <p:nvPr/>
+        </p:nvSpPr>
+        <p:spPr>
+          <a:xfrm flipH="1" flipV="1">
+            <a:off x="4304295" y="2643758"/>
+            <a:ext cx="51681" cy="45719"/>
+          </a:xfrm>
+          <a:prstGeom prst="ellipse">
+            <a:avLst/>
+          </a:prstGeom>
+          <a:solidFill>
+            <a:schemeClr val="tx1"/>
+          </a:solidFill>
+          <a:ln>
+            <a:noFill/>
+          </a:ln>
+        </p:spPr>
+        <p:style>
+          <a:lnRef idx="2">
+            <a:schemeClr val="accent1">
+              <a:shade val="15000"/>
+            </a:schemeClr>
+          </a:lnRef>
+          <a:fillRef idx="1">
+            <a:schemeClr val="accent1"/>
+          </a:fillRef>
+          <a:effectRef idx="0">
+            <a:schemeClr val="accent1"/>
+          </a:effectRef>
+          <a:fontRef idx="minor">
+            <a:schemeClr val="lt1"/>
+          </a:fontRef>
+        </p:style>
+        <p:txBody>
+          <a:bodyPr rtlCol="0" anchor="ctr"/>
+          <a:lstStyle/>
+          <a:p>
+            <a:pPr algn="ctr"/>
+            <a:endParaRPr kumimoji="1" lang="ko-KR" altLang="en-US"/>
+          </a:p>
+        </p:txBody>
+      </p:sp>
+      <p:sp>
+        <p:nvSpPr>
+          <p:cNvPr id="56" name="모서리가 둥근 직사각형 55">
+            <a:extLst>
+              <a:ext uri="{FF2B5EF4-FFF2-40B4-BE49-F238E27FC236}">
+                <a16:creationId xmlns:a16="http://schemas.microsoft.com/office/drawing/2014/main" id="{202E5D3F-8EB9-0BD9-4202-AA2C05D73D92}"/>
+              </a:ext>
+            </a:extLst>
+          </p:cNvPr>
+          <p:cNvSpPr/>
+          <p:nvPr/>
+        </p:nvSpPr>
+        <p:spPr>
+          <a:xfrm>
+            <a:off x="6419175" y="1877266"/>
+            <a:ext cx="1052864" cy="427640"/>
+          </a:xfrm>
+          <a:prstGeom prst="roundRect">
+            <a:avLst>
+              <a:gd name="adj" fmla="val 12191"/>
+            </a:avLst>
+          </a:prstGeom>
+          <a:solidFill>
+            <a:schemeClr val="bg1"/>
+          </a:solidFill>
+          <a:ln w="12700"/>
+        </p:spPr>
+        <p:style>
+          <a:lnRef idx="2">
+            <a:schemeClr val="accent1">
+              <a:shade val="15000"/>
+            </a:schemeClr>
+          </a:lnRef>
+          <a:fillRef idx="1">
+            <a:schemeClr val="accent1"/>
+          </a:fillRef>
+          <a:effectRef idx="0">
+            <a:schemeClr val="accent1"/>
+          </a:effectRef>
+          <a:fontRef idx="minor">
+            <a:schemeClr val="lt1"/>
+          </a:fontRef>
+        </p:style>
+        <p:txBody>
+          <a:bodyPr rtlCol="0" anchor="ctr"/>
+          <a:lstStyle/>
+          <a:p>
+            <a:pPr algn="ctr"/>
+            <a:r>
+              <a:rPr kumimoji="1" lang="en-US" altLang="ko-KR" sz="800">
+                <a:solidFill>
+                  <a:schemeClr val="tx1"/>
+                </a:solidFill>
+              </a:rPr>
+              <a:t>Downstream (TLS)</a:t>
+            </a:r>
+          </a:p>
+          <a:p>
+            <a:pPr algn="ctr"/>
+            <a:r>
+              <a:rPr kumimoji="1" lang="en-US" altLang="ko-KR" sz="800">
+                <a:solidFill>
+                  <a:schemeClr val="tx1"/>
+                </a:solidFill>
+              </a:rPr>
+              <a:t>Transport Socket</a:t>
+            </a:r>
+            <a:endParaRPr kumimoji="1" lang="ko-KR" altLang="en-US" sz="800">
+              <a:solidFill>
+                <a:schemeClr val="tx1"/>
+              </a:solidFill>
+            </a:endParaRPr>
+          </a:p>
+        </p:txBody>
+      </p:sp>
     </p:spTree>
     <p:extLst>
       <p:ext uri="{BB962C8B-B14F-4D97-AF65-F5344CB8AC3E}">
@@ -3410,7 +7387,7 @@
 </p:sld>
 </file>
 
-<file path=ppt/slides/slide2.xml><?xml version="1.0" encoding="utf-8"?>
+<file path=ppt/slides/slide3.xml><?xml version="1.0" encoding="utf-8"?>
 <p:sld xmlns:a="http://schemas.openxmlformats.org/drawingml/2006/main" xmlns:r="http://schemas.openxmlformats.org/officeDocument/2006/relationships" xmlns:p="http://schemas.openxmlformats.org/presentationml/2006/main">
   <p:cSld>
     <p:spTree>
@@ -3446,7 +7423,7 @@
 </p:sld>
 </file>
 
-<file path=ppt/slides/slide3.xml><?xml version="1.0" encoding="utf-8"?>
+<file path=ppt/slides/slide4.xml><?xml version="1.0" encoding="utf-8"?>
 <p:sld xmlns:a="http://schemas.openxmlformats.org/drawingml/2006/main" xmlns:r="http://schemas.openxmlformats.org/officeDocument/2006/relationships" xmlns:p="http://schemas.openxmlformats.org/presentationml/2006/main">
   <p:cSld>
     <p:spTree>
@@ -9433,7 +13410,7 @@
 </p:sld>
 </file>
 
-<file path=ppt/slides/slide4.xml><?xml version="1.0" encoding="utf-8"?>
+<file path=ppt/slides/slide5.xml><?xml version="1.0" encoding="utf-8"?>
 <p:sld xmlns:a="http://schemas.openxmlformats.org/drawingml/2006/main" xmlns:r="http://schemas.openxmlformats.org/officeDocument/2006/relationships" xmlns:p="http://schemas.openxmlformats.org/presentationml/2006/main">
   <p:cSld>
     <p:spTree>
@@ -14204,7 +18181,7 @@
 </p:sld>
 </file>
 
-<file path=ppt/slides/slide5.xml><?xml version="1.0" encoding="utf-8"?>
+<file path=ppt/slides/slide6.xml><?xml version="1.0" encoding="utf-8"?>
 <p:sld xmlns:a="http://schemas.openxmlformats.org/drawingml/2006/main" xmlns:r="http://schemas.openxmlformats.org/officeDocument/2006/relationships" xmlns:p="http://schemas.openxmlformats.org/presentationml/2006/main">
   <p:cSld>
     <p:spTree>
